--- a/meeting/Zon_Terras_In_Gent_Milestone2.pptx
+++ b/meeting/Zon_Terras_In_Gent_Milestone2.pptx
@@ -4,6 +4,9 @@
   <p:sldMasterIdLst>
     <p:sldMasterId id="2147483648" r:id="rId1"/>
   </p:sldMasterIdLst>
+  <p:notesMasterIdLst>
+    <p:notesMasterId r:id="rId18"/>
+  </p:notesMasterIdLst>
   <p:sldIdLst>
     <p:sldId id="256" r:id="rId2"/>
     <p:sldId id="257" r:id="rId3"/>
@@ -22,10 +25,7 @@
     <p:sldId id="270" r:id="rId16"/>
     <p:sldId id="271" r:id="rId17"/>
   </p:sldIdLst>
-  <p:notesMasterIdLst>
-    <p:notesMasterId r:id="rId18"/>
-  </p:notesMasterIdLst>
-  <p:sldSz cx="9144000" cy="5143500"/>
+  <p:sldSz cx="9144000" cy="5143500" type="screen16x9"/>
   <p:notesSz cx="5143500" cy="9144000"/>
   <p:defaultTextStyle>
     <a:lvl1pPr marL="0" algn="l" defTabSz="914400" rtl="0" eaLnBrk="1" latinLnBrk="0" hangingPunct="1">
@@ -119,6 +119,11 @@
       </a:defRPr>
     </a:lvl9pPr>
   </p:defaultTextStyle>
+  <p:extLst>
+    <p:ext uri="{EFAFB233-063F-42B5-8137-9DF3F51BA10A}">
+      <p15:sldGuideLst xmlns:p15="http://schemas.microsoft.com/office/powerpoint/2012/main"/>
+    </p:ext>
+  </p:extLst>
 </p:presentation>
 </file>
 
@@ -144,234 +149,10 @@
           <a:chExt cx="0" cy="0"/>
         </a:xfrm>
       </p:grpSpPr>
-      <p:sp>
-        <p:nvSpPr>
-          <p:cNvPr id="2" name="Header Placeholder 1"/>
-          <p:cNvSpPr>
-            <a:spLocks noGrp="1"/>
-          </p:cNvSpPr>
-          <p:nvPr>
-            <p:ph type="hdr" sz="quarter"/>
-          </p:nvPr>
-        </p:nvSpPr>
-        <p:spPr>
-          <a:xfrm>
-            <a:off x="0" y="0"/>
-            <a:ext cx="2971800" cy="458788"/>
-          </a:xfrm>
-          <a:prstGeom prst="rect">
-            <a:avLst/>
-          </a:prstGeom>
-        </p:spPr>
-        <p:txBody>
-          <a:bodyPr vert="horz" lIns="91440" tIns="45720" rIns="91440" bIns="45720" rtlCol="0"/>
-          <a:lstStyle>
-            <a:lvl1pPr algn="l">
-              <a:defRPr sz="1200"/>
-            </a:lvl1pPr>
-          </a:lstStyle>
-          <a:p>
-            <a:endParaRPr lang="en-US"/>
-          </a:p>
-        </p:txBody>
-      </p:sp>
-      <p:sp>
-        <p:nvSpPr>
-          <p:cNvPr id="3" name="Date Placeholder 2"/>
-          <p:cNvSpPr>
-            <a:spLocks noGrp="1"/>
-          </p:cNvSpPr>
-          <p:nvPr>
-            <p:ph type="dt" idx="1"/>
-          </p:nvPr>
-        </p:nvSpPr>
-        <p:spPr>
-          <a:xfrm>
-            <a:off x="3884613" y="0"/>
-            <a:ext cx="2971800" cy="458788"/>
-          </a:xfrm>
-          <a:prstGeom prst="rect">
-            <a:avLst/>
-          </a:prstGeom>
-        </p:spPr>
-        <p:txBody>
-          <a:bodyPr vert="horz" lIns="91440" tIns="45720" rIns="91440" bIns="45720" rtlCol="0"/>
-          <a:lstStyle>
-            <a:lvl1pPr algn="r">
-              <a:defRPr sz="1200"/>
-            </a:lvl1pPr>
-          </a:lstStyle>
-          <a:p>
-            <a:fld id="{5282F153-3F37-0F45-9E97-73ACFA13230C}" type="datetimeFigureOut">
-              <a:rPr lang="en-US"/>
-              <a:t>7/23/19</a:t>
-            </a:fld>
-            <a:endParaRPr lang="en-US"/>
-          </a:p>
-        </p:txBody>
-      </p:sp>
-      <p:sp>
-        <p:nvSpPr>
-          <p:cNvPr id="4" name="Slide Image Placeholder 3"/>
-          <p:cNvSpPr>
-            <a:spLocks noGrp="1" noRot="1" noChangeAspect="1"/>
-          </p:cNvSpPr>
-          <p:nvPr>
-            <p:ph type="sldImg" idx="2"/>
-          </p:nvPr>
-        </p:nvSpPr>
-        <p:spPr>
-          <a:xfrm>
-            <a:off x="685800" y="1143000"/>
-            <a:ext cx="5486400" cy="3086100"/>
-          </a:xfrm>
-          <a:prstGeom prst="rect">
-            <a:avLst/>
-          </a:prstGeom>
-          <a:noFill/>
-          <a:ln w="12700">
-            <a:solidFill>
-              <a:prstClr val="black"/>
-            </a:solidFill>
-          </a:ln>
-        </p:spPr>
-        <p:txBody>
-          <a:bodyPr vert="horz" lIns="91440" tIns="45720" rIns="91440" bIns="45720" rtlCol="0" anchor="ctr"/>
-          <a:lstStyle/>
-          <a:p>
-            <a:endParaRPr lang="en-US"/>
-          </a:p>
-        </p:txBody>
-      </p:sp>
-      <p:sp>
-        <p:nvSpPr>
-          <p:cNvPr id="5" name="Notes Placeholder 4"/>
-          <p:cNvSpPr>
-            <a:spLocks noGrp="1"/>
-          </p:cNvSpPr>
-          <p:nvPr>
-            <p:ph type="body" sz="quarter" idx="3"/>
-          </p:nvPr>
-        </p:nvSpPr>
-        <p:spPr>
-          <a:xfrm>
-            <a:off x="685800" y="4400550"/>
-            <a:ext cx="5486400" cy="3600450"/>
-          </a:xfrm>
-          <a:prstGeom prst="rect">
-            <a:avLst/>
-          </a:prstGeom>
-        </p:spPr>
-        <p:txBody>
-          <a:bodyPr vert="horz" lIns="91440" tIns="45720" rIns="91440" bIns="45720" rtlCol="0"/>
-          <a:lstStyle/>
-          <a:p>
-            <a:pPr lvl="0"/>
-            <a:r>
-              <a:rPr lang="en-US"/>
-              <a:t>Click to edit Master text styles</a:t>
-            </a:r>
-          </a:p>
-          <a:p>
-            <a:pPr lvl="1"/>
-            <a:r>
-              <a:rPr lang="en-US"/>
-              <a:t>Second level</a:t>
-            </a:r>
-          </a:p>
-          <a:p>
-            <a:pPr lvl="2"/>
-            <a:r>
-              <a:rPr lang="en-US"/>
-              <a:t>Third level</a:t>
-            </a:r>
-          </a:p>
-          <a:p>
-            <a:pPr lvl="3"/>
-            <a:r>
-              <a:rPr lang="en-US"/>
-              <a:t>Fourth level</a:t>
-            </a:r>
-          </a:p>
-          <a:p>
-            <a:pPr lvl="4"/>
-            <a:r>
-              <a:rPr lang="en-US"/>
-              <a:t>Fifth level</a:t>
-            </a:r>
-          </a:p>
-        </p:txBody>
-      </p:sp>
-      <p:sp>
-        <p:nvSpPr>
-          <p:cNvPr id="6" name="Footer Placeholder 5"/>
-          <p:cNvSpPr>
-            <a:spLocks noGrp="1"/>
-          </p:cNvSpPr>
-          <p:nvPr>
-            <p:ph type="ftr" sz="quarter" idx="4"/>
-          </p:nvPr>
-        </p:nvSpPr>
-        <p:spPr>
-          <a:xfrm>
-            <a:off x="0" y="8685213"/>
-            <a:ext cx="2971800" cy="458787"/>
-          </a:xfrm>
-          <a:prstGeom prst="rect">
-            <a:avLst/>
-          </a:prstGeom>
-        </p:spPr>
-        <p:txBody>
-          <a:bodyPr vert="horz" lIns="91440" tIns="45720" rIns="91440" bIns="45720" rtlCol="0" anchor="b"/>
-          <a:lstStyle>
-            <a:lvl1pPr algn="l">
-              <a:defRPr sz="1200"/>
-            </a:lvl1pPr>
-          </a:lstStyle>
-          <a:p>
-            <a:endParaRPr lang="en-US"/>
-          </a:p>
-        </p:txBody>
-      </p:sp>
-      <p:sp>
-        <p:nvSpPr>
-          <p:cNvPr id="7" name="Slide Number Placeholder 6"/>
-          <p:cNvSpPr>
-            <a:spLocks noGrp="1"/>
-          </p:cNvSpPr>
-          <p:nvPr>
-            <p:ph type="sldNum" sz="quarter" idx="5"/>
-          </p:nvPr>
-        </p:nvSpPr>
-        <p:spPr>
-          <a:xfrm>
-            <a:off x="3884613" y="8685213"/>
-            <a:ext cx="2971800" cy="458787"/>
-          </a:xfrm>
-          <a:prstGeom prst="rect">
-            <a:avLst/>
-          </a:prstGeom>
-        </p:spPr>
-        <p:txBody>
-          <a:bodyPr vert="horz" lIns="91440" tIns="45720" rIns="91440" bIns="45720" rtlCol="0" anchor="b"/>
-          <a:lstStyle>
-            <a:lvl1pPr algn="r">
-              <a:defRPr sz="1200"/>
-            </a:lvl1pPr>
-          </a:lstStyle>
-          <a:p>
-            <a:fld id="{CE5E9CC1-C706-0F49-92D6-E571CC5EEA8F}" type="slidenum">
-              <a:rPr lang="en-US"/>
-              <a:t>‹#›</a:t>
-            </a:fld>
-            <a:endParaRPr lang="en-US"/>
-          </a:p>
-        </p:txBody>
-      </p:sp>
     </p:spTree>
     <p:extLst>
       <p:ext uri="{BB962C8B-B14F-4D97-AF65-F5344CB8AC3E}">
-        <p14:creationId xmlns:p14="http://schemas.microsoft.com/office/powerpoint/2010/main" val="1024086991"/>
+        <p14:creationId xmlns:p14="http://schemas.microsoft.com/office/powerpoint/2010/main" val="3115060842"/>
       </p:ext>
     </p:extLst>
   </p:cSld>
@@ -515,10 +296,6 @@
           <a:bodyPr/>
           <a:lstStyle/>
           <a:p>
-            <a:r>
-              <a:rPr lang="en-US" dirty="0"/>
-              <a:t/>
-            </a:r>
             <a:endParaRPr lang="en-US" dirty="0"/>
           </a:p>
         </p:txBody>
@@ -603,10 +380,6 @@
           <a:bodyPr/>
           <a:lstStyle/>
           <a:p>
-            <a:r>
-              <a:rPr lang="en-US" dirty="0"/>
-              <a:t/>
-            </a:r>
             <a:endParaRPr lang="en-US" dirty="0"/>
           </a:p>
         </p:txBody>
@@ -691,10 +464,6 @@
           <a:bodyPr/>
           <a:lstStyle/>
           <a:p>
-            <a:r>
-              <a:rPr lang="en-US" dirty="0"/>
-              <a:t/>
-            </a:r>
             <a:endParaRPr lang="en-US" dirty="0"/>
           </a:p>
         </p:txBody>
@@ -779,10 +548,6 @@
           <a:bodyPr/>
           <a:lstStyle/>
           <a:p>
-            <a:r>
-              <a:rPr lang="en-US" dirty="0"/>
-              <a:t/>
-            </a:r>
             <a:endParaRPr lang="en-US" dirty="0"/>
           </a:p>
         </p:txBody>
@@ -867,10 +632,6 @@
           <a:bodyPr/>
           <a:lstStyle/>
           <a:p>
-            <a:r>
-              <a:rPr lang="en-US" dirty="0"/>
-              <a:t/>
-            </a:r>
             <a:endParaRPr lang="en-US" dirty="0"/>
           </a:p>
         </p:txBody>
@@ -955,10 +716,6 @@
           <a:bodyPr/>
           <a:lstStyle/>
           <a:p>
-            <a:r>
-              <a:rPr lang="en-US" dirty="0"/>
-              <a:t/>
-            </a:r>
             <a:endParaRPr lang="en-US" dirty="0"/>
           </a:p>
         </p:txBody>
@@ -1043,10 +800,6 @@
           <a:bodyPr/>
           <a:lstStyle/>
           <a:p>
-            <a:r>
-              <a:rPr lang="en-US" dirty="0"/>
-              <a:t/>
-            </a:r>
             <a:endParaRPr lang="en-US" dirty="0"/>
           </a:p>
         </p:txBody>
@@ -1131,10 +884,6 @@
           <a:bodyPr/>
           <a:lstStyle/>
           <a:p>
-            <a:r>
-              <a:rPr lang="en-US" dirty="0"/>
-              <a:t/>
-            </a:r>
             <a:endParaRPr lang="en-US" dirty="0"/>
           </a:p>
         </p:txBody>
@@ -1219,10 +968,6 @@
           <a:bodyPr/>
           <a:lstStyle/>
           <a:p>
-            <a:r>
-              <a:rPr lang="en-US" dirty="0"/>
-              <a:t/>
-            </a:r>
             <a:endParaRPr lang="en-US" dirty="0"/>
           </a:p>
         </p:txBody>
@@ -1307,10 +1052,6 @@
           <a:bodyPr/>
           <a:lstStyle/>
           <a:p>
-            <a:r>
-              <a:rPr lang="en-US" dirty="0"/>
-              <a:t/>
-            </a:r>
             <a:endParaRPr lang="en-US" dirty="0"/>
           </a:p>
         </p:txBody>
@@ -1395,10 +1136,6 @@
           <a:bodyPr/>
           <a:lstStyle/>
           <a:p>
-            <a:r>
-              <a:rPr lang="en-US" dirty="0"/>
-              <a:t/>
-            </a:r>
             <a:endParaRPr lang="en-US" dirty="0"/>
           </a:p>
         </p:txBody>
@@ -1483,10 +1220,6 @@
           <a:bodyPr/>
           <a:lstStyle/>
           <a:p>
-            <a:r>
-              <a:rPr lang="en-US" dirty="0"/>
-              <a:t/>
-            </a:r>
             <a:endParaRPr lang="en-US" dirty="0"/>
           </a:p>
         </p:txBody>
@@ -1571,10 +1304,6 @@
           <a:bodyPr/>
           <a:lstStyle/>
           <a:p>
-            <a:r>
-              <a:rPr lang="en-US" dirty="0"/>
-              <a:t/>
-            </a:r>
             <a:endParaRPr lang="en-US" dirty="0"/>
           </a:p>
         </p:txBody>
@@ -1659,10 +1388,6 @@
           <a:bodyPr/>
           <a:lstStyle/>
           <a:p>
-            <a:r>
-              <a:rPr lang="en-US" dirty="0"/>
-              <a:t/>
-            </a:r>
             <a:endParaRPr lang="en-US" dirty="0"/>
           </a:p>
         </p:txBody>
@@ -1747,10 +1472,6 @@
           <a:bodyPr/>
           <a:lstStyle/>
           <a:p>
-            <a:r>
-              <a:rPr lang="en-US" dirty="0"/>
-              <a:t/>
-            </a:r>
             <a:endParaRPr lang="en-US" dirty="0"/>
           </a:p>
         </p:txBody>
@@ -1835,10 +1556,6 @@
           <a:bodyPr/>
           <a:lstStyle/>
           <a:p>
-            <a:r>
-              <a:rPr lang="en-US" dirty="0"/>
-              <a:t/>
-            </a:r>
             <a:endParaRPr lang="en-US" dirty="0"/>
           </a:p>
         </p:txBody>
@@ -1912,6 +1629,11 @@
 <file path=ppt/slideMasters/slideMaster1.xml><?xml version="1.0" encoding="utf-8"?>
 <p:sldMaster xmlns:a="http://schemas.openxmlformats.org/drawingml/2006/main" xmlns:r="http://schemas.openxmlformats.org/officeDocument/2006/relationships" xmlns:p="http://schemas.openxmlformats.org/presentationml/2006/main">
   <p:cSld>
+    <p:bg>
+      <p:bgRef idx="1001">
+        <a:schemeClr val="bg1"/>
+      </p:bgRef>
+    </p:bg>
     <p:spTree>
       <p:nvGrpSpPr>
         <p:cNvPr id="1" name=""/>
@@ -2194,6 +1916,7 @@
         <a:solidFill>
           <a:srgbClr val="1A1208"/>
         </a:solidFill>
+        <a:effectLst/>
       </p:bgPr>
     </p:bg>
     <p:spTree>
@@ -2236,6 +1959,13 @@
             <a:prstDash val="solid"/>
           </a:ln>
         </p:spPr>
+        <p:txBody>
+          <a:bodyPr/>
+          <a:lstStyle/>
+          <a:p>
+            <a:endParaRPr lang="en-BE"/>
+          </a:p>
+        </p:txBody>
       </p:sp>
       <p:sp>
         <p:nvSpPr>
@@ -2263,6 +1993,13 @@
             <a:prstDash val="solid"/>
           </a:ln>
         </p:spPr>
+        <p:txBody>
+          <a:bodyPr/>
+          <a:lstStyle/>
+          <a:p>
+            <a:endParaRPr lang="en-BE"/>
+          </a:p>
+        </p:txBody>
       </p:sp>
       <p:sp>
         <p:nvSpPr>
@@ -2288,6 +2025,13 @@
             <a:prstDash val="solid"/>
           </a:ln>
         </p:spPr>
+        <p:txBody>
+          <a:bodyPr/>
+          <a:lstStyle/>
+          <a:p>
+            <a:endParaRPr lang="en-BE"/>
+          </a:p>
+        </p:txBody>
       </p:sp>
       <p:sp>
         <p:nvSpPr>
@@ -2310,11 +2054,11 @@
           <a:bodyPr wrap="square" lIns="0" tIns="0" rIns="0" bIns="0" rtlCol="0" anchor="ctr"/>
           <a:lstStyle/>
           <a:p>
-            <a:pPr indent="0" marL="0">
-              <a:buNone/>
-            </a:pPr>
-            <a:r>
-              <a:rPr lang="en-US" sz="850" spc="300" kern="0" dirty="0">
+            <a:pPr marL="0" indent="0">
+              <a:buNone/>
+            </a:pPr>
+            <a:r>
+              <a:rPr lang="en-US" sz="850" kern="0" spc="300" dirty="0">
                 <a:solidFill>
                   <a:srgbClr val="F5AC32"/>
                 </a:solidFill>
@@ -2349,7 +2093,7 @@
           <a:bodyPr wrap="square" lIns="0" tIns="0" rIns="0" bIns="0" rtlCol="0" anchor="ctr"/>
           <a:lstStyle/>
           <a:p>
-            <a:pPr indent="0" marL="0">
+            <a:pPr marL="0" indent="0">
               <a:buNone/>
             </a:pPr>
             <a:r>
@@ -2391,6 +2135,13 @@
             <a:prstDash val="solid"/>
           </a:ln>
         </p:spPr>
+        <p:txBody>
+          <a:bodyPr/>
+          <a:lstStyle/>
+          <a:p>
+            <a:endParaRPr lang="en-BE"/>
+          </a:p>
+        </p:txBody>
       </p:sp>
       <p:sp>
         <p:nvSpPr>
@@ -2413,7 +2164,7 @@
           <a:bodyPr wrap="square" lIns="0" tIns="0" rIns="0" bIns="0" rtlCol="0" anchor="ctr"/>
           <a:lstStyle/>
           <a:p>
-            <a:pPr algn="ctr" indent="0" marL="0">
+            <a:pPr marL="0" indent="0" algn="ctr">
               <a:buNone/>
             </a:pPr>
             <a:r>
@@ -2452,7 +2203,7 @@
           <a:bodyPr wrap="square" lIns="0" tIns="0" rIns="0" bIns="0" rtlCol="0" anchor="ctr"/>
           <a:lstStyle/>
           <a:p>
-            <a:pPr indent="0" marL="0">
+            <a:pPr marL="0" indent="0">
               <a:buNone/>
             </a:pPr>
             <a:r>
@@ -2491,7 +2242,7 @@
           <a:bodyPr wrap="square" lIns="0" tIns="0" rIns="0" bIns="0" rtlCol="0" anchor="ctr"/>
           <a:lstStyle/>
           <a:p>
-            <a:pPr indent="0" marL="0">
+            <a:pPr marL="0" indent="0">
               <a:buNone/>
             </a:pPr>
             <a:r>
@@ -2530,7 +2281,7 @@
           <a:bodyPr wrap="square" lIns="0" tIns="0" rIns="0" bIns="0" rtlCol="0" anchor="ctr"/>
           <a:lstStyle/>
           <a:p>
-            <a:pPr indent="0" marL="0">
+            <a:pPr marL="0" indent="0">
               <a:buNone/>
             </a:pPr>
             <a:r>
@@ -2564,6 +2315,7 @@
         <a:solidFill>
           <a:srgbClr val="FAF5EC"/>
         </a:solidFill>
+        <a:effectLst/>
       </p:bgPr>
     </p:bg>
     <p:spTree>
@@ -2604,6 +2356,13 @@
             <a:prstDash val="solid"/>
           </a:ln>
         </p:spPr>
+        <p:txBody>
+          <a:bodyPr/>
+          <a:lstStyle/>
+          <a:p>
+            <a:endParaRPr lang="en-BE"/>
+          </a:p>
+        </p:txBody>
       </p:sp>
       <p:sp>
         <p:nvSpPr>
@@ -2626,7 +2385,7 @@
           <a:bodyPr wrap="square" lIns="0" tIns="0" rIns="0" bIns="0" rtlCol="0" anchor="ctr"/>
           <a:lstStyle/>
           <a:p>
-            <a:pPr indent="0" marL="0">
+            <a:pPr marL="0" indent="0">
               <a:buNone/>
             </a:pPr>
             <a:r>
@@ -2665,7 +2424,7 @@
           <a:bodyPr wrap="square" lIns="0" tIns="0" rIns="0" bIns="0" rtlCol="0" anchor="ctr"/>
           <a:lstStyle/>
           <a:p>
-            <a:pPr indent="0" marL="0">
+            <a:pPr marL="0" indent="0">
               <a:buNone/>
             </a:pPr>
             <a:r>
@@ -2704,7 +2463,7 @@
           <a:bodyPr wrap="square" lIns="0" tIns="0" rIns="0" bIns="0" rtlCol="0" anchor="ctr"/>
           <a:lstStyle/>
           <a:p>
-            <a:pPr indent="0" marL="0">
+            <a:pPr marL="0" indent="0">
               <a:buNone/>
             </a:pPr>
             <a:r>
@@ -2743,7 +2502,7 @@
           <a:bodyPr wrap="square" lIns="0" tIns="0" rIns="0" bIns="0" rtlCol="0" anchor="ctr"/>
           <a:lstStyle/>
           <a:p>
-            <a:pPr indent="0" marL="0">
+            <a:pPr marL="0" indent="0">
               <a:buNone/>
             </a:pPr>
             <a:r>
@@ -2785,6 +2544,13 @@
             <a:prstDash val="solid"/>
           </a:ln>
         </p:spPr>
+        <p:txBody>
+          <a:bodyPr/>
+          <a:lstStyle/>
+          <a:p>
+            <a:endParaRPr lang="en-BE"/>
+          </a:p>
+        </p:txBody>
       </p:sp>
       <p:sp>
         <p:nvSpPr>
@@ -2810,6 +2576,13 @@
             <a:prstDash val="solid"/>
           </a:ln>
         </p:spPr>
+        <p:txBody>
+          <a:bodyPr/>
+          <a:lstStyle/>
+          <a:p>
+            <a:endParaRPr lang="en-BE"/>
+          </a:p>
+        </p:txBody>
       </p:sp>
       <p:sp>
         <p:nvSpPr>
@@ -2832,7 +2605,7 @@
           <a:bodyPr wrap="square" lIns="0" tIns="0" rIns="0" bIns="0" rtlCol="0" anchor="ctr"/>
           <a:lstStyle/>
           <a:p>
-            <a:pPr indent="0" marL="0">
+            <a:pPr marL="0" indent="0">
               <a:buNone/>
             </a:pPr>
             <a:r>
@@ -2871,7 +2644,7 @@
           <a:bodyPr wrap="square" lIns="0" tIns="0" rIns="0" bIns="0" rtlCol="0" anchor="ctr"/>
           <a:lstStyle/>
           <a:p>
-            <a:pPr indent="0" marL="0">
+            <a:pPr marL="0" indent="0">
               <a:buNone/>
             </a:pPr>
             <a:r>
@@ -2913,6 +2686,13 @@
             <a:prstDash val="solid"/>
           </a:ln>
         </p:spPr>
+        <p:txBody>
+          <a:bodyPr/>
+          <a:lstStyle/>
+          <a:p>
+            <a:endParaRPr lang="en-BE"/>
+          </a:p>
+        </p:txBody>
       </p:sp>
       <p:sp>
         <p:nvSpPr>
@@ -2938,6 +2718,13 @@
             <a:prstDash val="solid"/>
           </a:ln>
         </p:spPr>
+        <p:txBody>
+          <a:bodyPr/>
+          <a:lstStyle/>
+          <a:p>
+            <a:endParaRPr lang="en-BE"/>
+          </a:p>
+        </p:txBody>
       </p:sp>
       <p:sp>
         <p:nvSpPr>
@@ -2960,7 +2747,7 @@
           <a:bodyPr wrap="square" lIns="0" tIns="0" rIns="0" bIns="0" rtlCol="0" anchor="ctr"/>
           <a:lstStyle/>
           <a:p>
-            <a:pPr indent="0" marL="0">
+            <a:pPr marL="0" indent="0">
               <a:buNone/>
             </a:pPr>
             <a:r>
@@ -2999,7 +2786,7 @@
           <a:bodyPr wrap="square" lIns="0" tIns="0" rIns="0" bIns="0" rtlCol="0" anchor="ctr"/>
           <a:lstStyle/>
           <a:p>
-            <a:pPr indent="0" marL="0">
+            <a:pPr marL="0" indent="0">
               <a:buNone/>
             </a:pPr>
             <a:r>
@@ -3041,6 +2828,13 @@
             <a:prstDash val="solid"/>
           </a:ln>
         </p:spPr>
+        <p:txBody>
+          <a:bodyPr/>
+          <a:lstStyle/>
+          <a:p>
+            <a:endParaRPr lang="en-BE"/>
+          </a:p>
+        </p:txBody>
       </p:sp>
       <p:sp>
         <p:nvSpPr>
@@ -3066,6 +2860,13 @@
             <a:prstDash val="solid"/>
           </a:ln>
         </p:spPr>
+        <p:txBody>
+          <a:bodyPr/>
+          <a:lstStyle/>
+          <a:p>
+            <a:endParaRPr lang="en-BE"/>
+          </a:p>
+        </p:txBody>
       </p:sp>
       <p:sp>
         <p:nvSpPr>
@@ -3088,7 +2889,7 @@
           <a:bodyPr wrap="square" lIns="0" tIns="0" rIns="0" bIns="0" rtlCol="0" anchor="ctr"/>
           <a:lstStyle/>
           <a:p>
-            <a:pPr indent="0" marL="0">
+            <a:pPr marL="0" indent="0">
               <a:buNone/>
             </a:pPr>
             <a:r>
@@ -3127,7 +2928,7 @@
           <a:bodyPr wrap="square" lIns="0" tIns="0" rIns="0" bIns="0" rtlCol="0" anchor="ctr"/>
           <a:lstStyle/>
           <a:p>
-            <a:pPr indent="0" marL="0">
+            <a:pPr marL="0" indent="0">
               <a:buNone/>
             </a:pPr>
             <a:r>
@@ -3169,6 +2970,13 @@
             <a:prstDash val="solid"/>
           </a:ln>
         </p:spPr>
+        <p:txBody>
+          <a:bodyPr/>
+          <a:lstStyle/>
+          <a:p>
+            <a:endParaRPr lang="en-BE"/>
+          </a:p>
+        </p:txBody>
       </p:sp>
       <p:sp>
         <p:nvSpPr>
@@ -3194,6 +3002,13 @@
             <a:prstDash val="solid"/>
           </a:ln>
         </p:spPr>
+        <p:txBody>
+          <a:bodyPr/>
+          <a:lstStyle/>
+          <a:p>
+            <a:endParaRPr lang="en-BE"/>
+          </a:p>
+        </p:txBody>
       </p:sp>
       <p:sp>
         <p:nvSpPr>
@@ -3216,7 +3031,7 @@
           <a:bodyPr wrap="square" lIns="0" tIns="0" rIns="0" bIns="0" rtlCol="0" anchor="ctr"/>
           <a:lstStyle/>
           <a:p>
-            <a:pPr indent="0" marL="0">
+            <a:pPr marL="0" indent="0">
               <a:buNone/>
             </a:pPr>
             <a:r>
@@ -3255,7 +3070,7 @@
           <a:bodyPr wrap="square" lIns="0" tIns="0" rIns="0" bIns="0" rtlCol="0" anchor="ctr"/>
           <a:lstStyle/>
           <a:p>
-            <a:pPr indent="0" marL="0">
+            <a:pPr marL="0" indent="0">
               <a:buNone/>
             </a:pPr>
             <a:r>
@@ -3297,6 +3112,13 @@
             <a:prstDash val="solid"/>
           </a:ln>
         </p:spPr>
+        <p:txBody>
+          <a:bodyPr/>
+          <a:lstStyle/>
+          <a:p>
+            <a:endParaRPr lang="en-BE"/>
+          </a:p>
+        </p:txBody>
       </p:sp>
       <p:sp>
         <p:nvSpPr>
@@ -3322,6 +3144,13 @@
             <a:prstDash val="solid"/>
           </a:ln>
         </p:spPr>
+        <p:txBody>
+          <a:bodyPr/>
+          <a:lstStyle/>
+          <a:p>
+            <a:endParaRPr lang="en-BE"/>
+          </a:p>
+        </p:txBody>
       </p:sp>
       <p:sp>
         <p:nvSpPr>
@@ -3344,7 +3173,7 @@
           <a:bodyPr wrap="square" lIns="0" tIns="0" rIns="0" bIns="0" rtlCol="0" anchor="ctr"/>
           <a:lstStyle/>
           <a:p>
-            <a:pPr indent="0" marL="0">
+            <a:pPr marL="0" indent="0">
               <a:buNone/>
             </a:pPr>
             <a:r>
@@ -3383,7 +3212,7 @@
           <a:bodyPr wrap="square" lIns="0" tIns="0" rIns="0" bIns="0" rtlCol="0" anchor="ctr"/>
           <a:lstStyle/>
           <a:p>
-            <a:pPr indent="0" marL="0">
+            <a:pPr marL="0" indent="0">
               <a:buNone/>
             </a:pPr>
             <a:r>
@@ -3422,7 +3251,7 @@
           <a:bodyPr wrap="square" lIns="0" tIns="0" rIns="0" bIns="0" rtlCol="0" anchor="ctr"/>
           <a:lstStyle/>
           <a:p>
-            <a:pPr indent="0" marL="0">
+            <a:pPr marL="0" indent="0">
               <a:buNone/>
             </a:pPr>
             <a:r>
@@ -3464,6 +3293,13 @@
             <a:prstDash val="solid"/>
           </a:ln>
         </p:spPr>
+        <p:txBody>
+          <a:bodyPr/>
+          <a:lstStyle/>
+          <a:p>
+            <a:endParaRPr lang="en-BE"/>
+          </a:p>
+        </p:txBody>
       </p:sp>
       <p:sp>
         <p:nvSpPr>
@@ -3486,7 +3322,7 @@
           <a:bodyPr wrap="square" lIns="0" tIns="0" rIns="0" bIns="0" rtlCol="0" anchor="ctr"/>
           <a:lstStyle/>
           <a:p>
-            <a:pPr indent="0" marL="0">
+            <a:pPr marL="0" indent="0">
               <a:buNone/>
             </a:pPr>
             <a:r>
@@ -3525,7 +3361,7 @@
           <a:bodyPr wrap="square" lIns="0" tIns="0" rIns="0" bIns="0" rtlCol="0" anchor="ctr"/>
           <a:lstStyle/>
           <a:p>
-            <a:pPr indent="0" marL="0">
+            <a:pPr marL="0" indent="0">
               <a:buNone/>
             </a:pPr>
             <a:r>
@@ -3564,7 +3400,7 @@
           <a:bodyPr wrap="square" lIns="0" tIns="0" rIns="0" bIns="0" rtlCol="0" anchor="ctr"/>
           <a:lstStyle/>
           <a:p>
-            <a:pPr indent="0" marL="0">
+            <a:pPr marL="0" indent="0">
               <a:buNone/>
             </a:pPr>
             <a:r>
@@ -3603,7 +3439,7 @@
           <a:bodyPr wrap="square" lIns="0" tIns="0" rIns="0" bIns="0" rtlCol="0" anchor="ctr"/>
           <a:lstStyle/>
           <a:p>
-            <a:pPr indent="0" marL="0">
+            <a:pPr marL="0" indent="0">
               <a:buNone/>
             </a:pPr>
             <a:r>
@@ -3642,7 +3478,7 @@
           <a:bodyPr wrap="square" lIns="0" tIns="0" rIns="0" bIns="0" rtlCol="0" anchor="ctr"/>
           <a:lstStyle/>
           <a:p>
-            <a:pPr indent="0" marL="0">
+            <a:pPr marL="0" indent="0">
               <a:buNone/>
             </a:pPr>
             <a:r>
@@ -3681,7 +3517,7 @@
           <a:bodyPr wrap="square" lIns="0" tIns="0" rIns="0" bIns="0" rtlCol="0" anchor="ctr"/>
           <a:lstStyle/>
           <a:p>
-            <a:pPr indent="0" marL="0">
+            <a:pPr marL="0" indent="0">
               <a:buNone/>
             </a:pPr>
             <a:r>
@@ -3720,7 +3556,7 @@
           <a:bodyPr wrap="square" lIns="0" tIns="0" rIns="0" bIns="0" rtlCol="0" anchor="ctr"/>
           <a:lstStyle/>
           <a:p>
-            <a:pPr indent="0" marL="0">
+            <a:pPr marL="0" indent="0">
               <a:buNone/>
             </a:pPr>
             <a:r>
@@ -3759,7 +3595,7 @@
           <a:bodyPr wrap="square" lIns="0" tIns="0" rIns="0" bIns="0" rtlCol="0" anchor="ctr"/>
           <a:lstStyle/>
           <a:p>
-            <a:pPr indent="0" marL="0">
+            <a:pPr marL="0" indent="0">
               <a:buNone/>
             </a:pPr>
             <a:r>
@@ -3798,7 +3634,7 @@
           <a:bodyPr wrap="square" lIns="0" tIns="0" rIns="0" bIns="0" rtlCol="0" anchor="ctr"/>
           <a:lstStyle/>
           <a:p>
-            <a:pPr indent="0" marL="0">
+            <a:pPr marL="0" indent="0">
               <a:buNone/>
             </a:pPr>
             <a:r>
@@ -3837,7 +3673,7 @@
           <a:bodyPr wrap="square" lIns="0" tIns="0" rIns="0" bIns="0" rtlCol="0" anchor="ctr"/>
           <a:lstStyle/>
           <a:p>
-            <a:pPr indent="0" marL="0">
+            <a:pPr marL="0" indent="0">
               <a:buNone/>
             </a:pPr>
             <a:r>
@@ -3871,6 +3707,7 @@
         <a:solidFill>
           <a:srgbClr val="FAF5EC"/>
         </a:solidFill>
+        <a:effectLst/>
       </p:bgPr>
     </p:bg>
     <p:spTree>
@@ -3911,6 +3748,13 @@
             <a:prstDash val="solid"/>
           </a:ln>
         </p:spPr>
+        <p:txBody>
+          <a:bodyPr/>
+          <a:lstStyle/>
+          <a:p>
+            <a:endParaRPr lang="en-BE"/>
+          </a:p>
+        </p:txBody>
       </p:sp>
       <p:sp>
         <p:nvSpPr>
@@ -3933,7 +3777,7 @@
           <a:bodyPr wrap="square" lIns="0" tIns="0" rIns="0" bIns="0" rtlCol="0" anchor="ctr"/>
           <a:lstStyle/>
           <a:p>
-            <a:pPr indent="0" marL="0">
+            <a:pPr marL="0" indent="0">
               <a:buNone/>
             </a:pPr>
             <a:r>
@@ -3972,7 +3816,7 @@
           <a:bodyPr wrap="square" lIns="0" tIns="0" rIns="0" bIns="0" rtlCol="0" anchor="ctr"/>
           <a:lstStyle/>
           <a:p>
-            <a:pPr indent="0" marL="0">
+            <a:pPr marL="0" indent="0">
               <a:buNone/>
             </a:pPr>
             <a:r>
@@ -4011,7 +3855,7 @@
           <a:bodyPr wrap="square" lIns="0" tIns="0" rIns="0" bIns="0" rtlCol="0" anchor="ctr"/>
           <a:lstStyle/>
           <a:p>
-            <a:pPr indent="0" marL="0">
+            <a:pPr marL="0" indent="0">
               <a:buNone/>
             </a:pPr>
             <a:r>
@@ -4053,6 +3897,13 @@
             <a:prstDash val="solid"/>
           </a:ln>
         </p:spPr>
+        <p:txBody>
+          <a:bodyPr/>
+          <a:lstStyle/>
+          <a:p>
+            <a:endParaRPr lang="en-BE"/>
+          </a:p>
+        </p:txBody>
       </p:sp>
       <p:sp>
         <p:nvSpPr>
@@ -4078,6 +3929,13 @@
             <a:prstDash val="solid"/>
           </a:ln>
         </p:spPr>
+        <p:txBody>
+          <a:bodyPr/>
+          <a:lstStyle/>
+          <a:p>
+            <a:endParaRPr lang="en-BE"/>
+          </a:p>
+        </p:txBody>
       </p:sp>
       <p:sp>
         <p:nvSpPr>
@@ -4100,7 +3958,7 @@
           <a:bodyPr wrap="square" lIns="0" tIns="0" rIns="0" bIns="0" rtlCol="0" anchor="ctr"/>
           <a:lstStyle/>
           <a:p>
-            <a:pPr indent="0" marL="0">
+            <a:pPr marL="0" indent="0">
               <a:buNone/>
             </a:pPr>
             <a:r>
@@ -4139,7 +3997,7 @@
           <a:bodyPr wrap="square" lIns="0" tIns="0" rIns="0" bIns="0" rtlCol="0" anchor="ctr"/>
           <a:lstStyle/>
           <a:p>
-            <a:pPr algn="r" indent="0" marL="0">
+            <a:pPr marL="0" indent="0" algn="r">
               <a:buNone/>
             </a:pPr>
             <a:r>
@@ -4178,7 +4036,7 @@
           <a:bodyPr wrap="square" lIns="0" tIns="0" rIns="0" bIns="0" rtlCol="0" anchor="ctr"/>
           <a:lstStyle/>
           <a:p>
-            <a:pPr indent="0" marL="0">
+            <a:pPr marL="0" indent="0">
               <a:buNone/>
             </a:pPr>
             <a:r>
@@ -4220,6 +4078,13 @@
             <a:prstDash val="solid"/>
           </a:ln>
         </p:spPr>
+        <p:txBody>
+          <a:bodyPr/>
+          <a:lstStyle/>
+          <a:p>
+            <a:endParaRPr lang="en-BE"/>
+          </a:p>
+        </p:txBody>
       </p:sp>
       <p:sp>
         <p:nvSpPr>
@@ -4245,6 +4110,13 @@
             <a:prstDash val="solid"/>
           </a:ln>
         </p:spPr>
+        <p:txBody>
+          <a:bodyPr/>
+          <a:lstStyle/>
+          <a:p>
+            <a:endParaRPr lang="en-BE"/>
+          </a:p>
+        </p:txBody>
       </p:sp>
       <p:sp>
         <p:nvSpPr>
@@ -4267,7 +4139,7 @@
           <a:bodyPr wrap="square" lIns="0" tIns="0" rIns="0" bIns="0" rtlCol="0" anchor="ctr"/>
           <a:lstStyle/>
           <a:p>
-            <a:pPr indent="0" marL="0">
+            <a:pPr marL="0" indent="0">
               <a:buNone/>
             </a:pPr>
             <a:r>
@@ -4306,7 +4178,7 @@
           <a:bodyPr wrap="square" lIns="0" tIns="0" rIns="0" bIns="0" rtlCol="0" anchor="ctr"/>
           <a:lstStyle/>
           <a:p>
-            <a:pPr algn="r" indent="0" marL="0">
+            <a:pPr marL="0" indent="0" algn="r">
               <a:buNone/>
             </a:pPr>
             <a:r>
@@ -4345,7 +4217,7 @@
           <a:bodyPr wrap="square" lIns="0" tIns="0" rIns="0" bIns="0" rtlCol="0" anchor="ctr"/>
           <a:lstStyle/>
           <a:p>
-            <a:pPr indent="0" marL="0">
+            <a:pPr marL="0" indent="0">
               <a:buNone/>
             </a:pPr>
             <a:r>
@@ -4387,6 +4259,13 @@
             <a:prstDash val="solid"/>
           </a:ln>
         </p:spPr>
+        <p:txBody>
+          <a:bodyPr/>
+          <a:lstStyle/>
+          <a:p>
+            <a:endParaRPr lang="en-BE"/>
+          </a:p>
+        </p:txBody>
       </p:sp>
       <p:sp>
         <p:nvSpPr>
@@ -4412,6 +4291,13 @@
             <a:prstDash val="solid"/>
           </a:ln>
         </p:spPr>
+        <p:txBody>
+          <a:bodyPr/>
+          <a:lstStyle/>
+          <a:p>
+            <a:endParaRPr lang="en-BE"/>
+          </a:p>
+        </p:txBody>
       </p:sp>
       <p:sp>
         <p:nvSpPr>
@@ -4434,7 +4320,7 @@
           <a:bodyPr wrap="square" lIns="0" tIns="0" rIns="0" bIns="0" rtlCol="0" anchor="ctr"/>
           <a:lstStyle/>
           <a:p>
-            <a:pPr indent="0" marL="0">
+            <a:pPr marL="0" indent="0">
               <a:buNone/>
             </a:pPr>
             <a:r>
@@ -4473,7 +4359,7 @@
           <a:bodyPr wrap="square" lIns="0" tIns="0" rIns="0" bIns="0" rtlCol="0" anchor="ctr"/>
           <a:lstStyle/>
           <a:p>
-            <a:pPr algn="r" indent="0" marL="0">
+            <a:pPr marL="0" indent="0" algn="r">
               <a:buNone/>
             </a:pPr>
             <a:r>
@@ -4512,7 +4398,7 @@
           <a:bodyPr wrap="square" lIns="0" tIns="0" rIns="0" bIns="0" rtlCol="0" anchor="ctr"/>
           <a:lstStyle/>
           <a:p>
-            <a:pPr indent="0" marL="0">
+            <a:pPr marL="0" indent="0">
               <a:buNone/>
             </a:pPr>
             <a:r>
@@ -4554,6 +4440,13 @@
             <a:prstDash val="solid"/>
           </a:ln>
         </p:spPr>
+        <p:txBody>
+          <a:bodyPr/>
+          <a:lstStyle/>
+          <a:p>
+            <a:endParaRPr lang="en-BE"/>
+          </a:p>
+        </p:txBody>
       </p:sp>
       <p:sp>
         <p:nvSpPr>
@@ -4579,6 +4472,13 @@
             <a:prstDash val="solid"/>
           </a:ln>
         </p:spPr>
+        <p:txBody>
+          <a:bodyPr/>
+          <a:lstStyle/>
+          <a:p>
+            <a:endParaRPr lang="en-BE"/>
+          </a:p>
+        </p:txBody>
       </p:sp>
       <p:sp>
         <p:nvSpPr>
@@ -4601,7 +4501,7 @@
           <a:bodyPr wrap="square" lIns="0" tIns="0" rIns="0" bIns="0" rtlCol="0" anchor="ctr"/>
           <a:lstStyle/>
           <a:p>
-            <a:pPr indent="0" marL="0">
+            <a:pPr marL="0" indent="0">
               <a:buNone/>
             </a:pPr>
             <a:r>
@@ -4640,7 +4540,7 @@
           <a:bodyPr wrap="square" lIns="0" tIns="0" rIns="0" bIns="0" rtlCol="0" anchor="ctr"/>
           <a:lstStyle/>
           <a:p>
-            <a:pPr algn="r" indent="0" marL="0">
+            <a:pPr marL="0" indent="0" algn="r">
               <a:buNone/>
             </a:pPr>
             <a:r>
@@ -4679,7 +4579,7 @@
           <a:bodyPr wrap="square" lIns="0" tIns="0" rIns="0" bIns="0" rtlCol="0" anchor="ctr"/>
           <a:lstStyle/>
           <a:p>
-            <a:pPr indent="0" marL="0">
+            <a:pPr marL="0" indent="0">
               <a:buNone/>
             </a:pPr>
             <a:r>
@@ -4721,6 +4621,13 @@
             <a:prstDash val="solid"/>
           </a:ln>
         </p:spPr>
+        <p:txBody>
+          <a:bodyPr/>
+          <a:lstStyle/>
+          <a:p>
+            <a:endParaRPr lang="en-BE"/>
+          </a:p>
+        </p:txBody>
       </p:sp>
       <p:sp>
         <p:nvSpPr>
@@ -4746,6 +4653,13 @@
             <a:prstDash val="solid"/>
           </a:ln>
         </p:spPr>
+        <p:txBody>
+          <a:bodyPr/>
+          <a:lstStyle/>
+          <a:p>
+            <a:endParaRPr lang="en-BE"/>
+          </a:p>
+        </p:txBody>
       </p:sp>
       <p:sp>
         <p:nvSpPr>
@@ -4768,7 +4682,7 @@
           <a:bodyPr wrap="square" lIns="0" tIns="0" rIns="0" bIns="0" rtlCol="0" anchor="ctr"/>
           <a:lstStyle/>
           <a:p>
-            <a:pPr indent="0" marL="0">
+            <a:pPr marL="0" indent="0">
               <a:buNone/>
             </a:pPr>
             <a:r>
@@ -4807,7 +4721,7 @@
           <a:bodyPr wrap="square" lIns="0" tIns="0" rIns="0" bIns="0" rtlCol="0" anchor="ctr"/>
           <a:lstStyle/>
           <a:p>
-            <a:pPr algn="r" indent="0" marL="0">
+            <a:pPr marL="0" indent="0" algn="r">
               <a:buNone/>
             </a:pPr>
             <a:r>
@@ -4846,7 +4760,7 @@
           <a:bodyPr wrap="square" lIns="0" tIns="0" rIns="0" bIns="0" rtlCol="0" anchor="ctr"/>
           <a:lstStyle/>
           <a:p>
-            <a:pPr indent="0" marL="0">
+            <a:pPr marL="0" indent="0">
               <a:buNone/>
             </a:pPr>
             <a:r>
@@ -4885,7 +4799,7 @@
           <a:bodyPr wrap="square" lIns="0" tIns="0" rIns="0" bIns="0" rtlCol="0" anchor="ctr"/>
           <a:lstStyle/>
           <a:p>
-            <a:pPr indent="0" marL="0">
+            <a:pPr marL="0" indent="0">
               <a:buNone/>
             </a:pPr>
             <a:r>
@@ -5088,6 +5002,7 @@
         <a:solidFill>
           <a:srgbClr val="FAF5EC"/>
         </a:solidFill>
+        <a:effectLst/>
       </p:bgPr>
     </p:bg>
     <p:spTree>
@@ -5128,6 +5043,13 @@
             <a:prstDash val="solid"/>
           </a:ln>
         </p:spPr>
+        <p:txBody>
+          <a:bodyPr/>
+          <a:lstStyle/>
+          <a:p>
+            <a:endParaRPr lang="en-BE"/>
+          </a:p>
+        </p:txBody>
       </p:sp>
       <p:sp>
         <p:nvSpPr>
@@ -5150,7 +5072,7 @@
           <a:bodyPr wrap="square" lIns="0" tIns="0" rIns="0" bIns="0" rtlCol="0" anchor="ctr"/>
           <a:lstStyle/>
           <a:p>
-            <a:pPr indent="0" marL="0">
+            <a:pPr marL="0" indent="0">
               <a:buNone/>
             </a:pPr>
             <a:r>
@@ -5189,7 +5111,7 @@
           <a:bodyPr wrap="square" lIns="0" tIns="0" rIns="0" bIns="0" rtlCol="0" anchor="ctr"/>
           <a:lstStyle/>
           <a:p>
-            <a:pPr indent="0" marL="0">
+            <a:pPr marL="0" indent="0">
               <a:buNone/>
             </a:pPr>
             <a:r>
@@ -5228,7 +5150,7 @@
           <a:bodyPr wrap="square" lIns="0" tIns="0" rIns="0" bIns="0" rtlCol="0" anchor="ctr"/>
           <a:lstStyle/>
           <a:p>
-            <a:pPr indent="0" marL="0">
+            <a:pPr marL="0" indent="0">
               <a:buNone/>
             </a:pPr>
             <a:r>
@@ -5270,6 +5192,13 @@
             <a:prstDash val="solid"/>
           </a:ln>
         </p:spPr>
+        <p:txBody>
+          <a:bodyPr/>
+          <a:lstStyle/>
+          <a:p>
+            <a:endParaRPr lang="en-BE"/>
+          </a:p>
+        </p:txBody>
       </p:sp>
       <p:sp>
         <p:nvSpPr>
@@ -5292,7 +5221,7 @@
           <a:bodyPr wrap="square" lIns="0" tIns="0" rIns="0" bIns="0" rtlCol="0" anchor="ctr"/>
           <a:lstStyle/>
           <a:p>
-            <a:pPr algn="ctr" indent="0" marL="0">
+            <a:pPr marL="0" indent="0" algn="ctr">
               <a:buNone/>
             </a:pPr>
             <a:r>
@@ -5309,7 +5238,7 @@
             <a:endParaRPr lang="en-US" sz="950" dirty="0"/>
           </a:p>
           <a:p>
-            <a:pPr algn="ctr" indent="0" marL="0">
+            <a:pPr marL="0" indent="0" algn="ctr">
               <a:buNone/>
             </a:pPr>
             <a:r>
@@ -5351,6 +5280,13 @@
             <a:prstDash val="solid"/>
           </a:ln>
         </p:spPr>
+        <p:txBody>
+          <a:bodyPr/>
+          <a:lstStyle/>
+          <a:p>
+            <a:endParaRPr lang="en-BE"/>
+          </a:p>
+        </p:txBody>
       </p:sp>
       <p:sp>
         <p:nvSpPr>
@@ -5376,6 +5312,13 @@
             <a:prstDash val="solid"/>
           </a:ln>
         </p:spPr>
+        <p:txBody>
+          <a:bodyPr/>
+          <a:lstStyle/>
+          <a:p>
+            <a:endParaRPr lang="en-BE"/>
+          </a:p>
+        </p:txBody>
       </p:sp>
       <p:sp>
         <p:nvSpPr>
@@ -5398,7 +5341,7 @@
           <a:bodyPr wrap="square" lIns="0" tIns="0" rIns="0" bIns="0" rtlCol="0" anchor="ctr"/>
           <a:lstStyle/>
           <a:p>
-            <a:pPr algn="ctr" indent="0" marL="0">
+            <a:pPr marL="0" indent="0" algn="ctr">
               <a:buNone/>
             </a:pPr>
             <a:r>
@@ -5415,7 +5358,7 @@
             <a:endParaRPr lang="en-US" sz="950" dirty="0"/>
           </a:p>
           <a:p>
-            <a:pPr algn="ctr" indent="0" marL="0">
+            <a:pPr marL="0" indent="0" algn="ctr">
               <a:buNone/>
             </a:pPr>
             <a:r>
@@ -5457,6 +5400,13 @@
             <a:prstDash val="solid"/>
           </a:ln>
         </p:spPr>
+        <p:txBody>
+          <a:bodyPr/>
+          <a:lstStyle/>
+          <a:p>
+            <a:endParaRPr lang="en-BE"/>
+          </a:p>
+        </p:txBody>
       </p:sp>
       <p:sp>
         <p:nvSpPr>
@@ -5482,6 +5432,13 @@
             <a:prstDash val="solid"/>
           </a:ln>
         </p:spPr>
+        <p:txBody>
+          <a:bodyPr/>
+          <a:lstStyle/>
+          <a:p>
+            <a:endParaRPr lang="en-BE"/>
+          </a:p>
+        </p:txBody>
       </p:sp>
       <p:sp>
         <p:nvSpPr>
@@ -5504,7 +5461,7 @@
           <a:bodyPr wrap="square" lIns="0" tIns="0" rIns="0" bIns="0" rtlCol="0" anchor="ctr"/>
           <a:lstStyle/>
           <a:p>
-            <a:pPr algn="ctr" indent="0" marL="0">
+            <a:pPr marL="0" indent="0" algn="ctr">
               <a:buNone/>
             </a:pPr>
             <a:r>
@@ -5521,7 +5478,7 @@
             <a:endParaRPr lang="en-US" sz="950" dirty="0"/>
           </a:p>
           <a:p>
-            <a:pPr algn="ctr" indent="0" marL="0">
+            <a:pPr marL="0" indent="0" algn="ctr">
               <a:buNone/>
             </a:pPr>
             <a:r>
@@ -5563,6 +5520,13 @@
             <a:prstDash val="solid"/>
           </a:ln>
         </p:spPr>
+        <p:txBody>
+          <a:bodyPr/>
+          <a:lstStyle/>
+          <a:p>
+            <a:endParaRPr lang="en-BE"/>
+          </a:p>
+        </p:txBody>
       </p:sp>
       <p:sp>
         <p:nvSpPr>
@@ -5588,6 +5552,13 @@
             <a:prstDash val="solid"/>
           </a:ln>
         </p:spPr>
+        <p:txBody>
+          <a:bodyPr/>
+          <a:lstStyle/>
+          <a:p>
+            <a:endParaRPr lang="en-BE"/>
+          </a:p>
+        </p:txBody>
       </p:sp>
       <p:sp>
         <p:nvSpPr>
@@ -5610,7 +5581,7 @@
           <a:bodyPr wrap="square" lIns="0" tIns="0" rIns="0" bIns="0" rtlCol="0" anchor="ctr"/>
           <a:lstStyle/>
           <a:p>
-            <a:pPr algn="ctr" indent="0" marL="0">
+            <a:pPr marL="0" indent="0" algn="ctr">
               <a:buNone/>
             </a:pPr>
             <a:r>
@@ -5627,7 +5598,7 @@
             <a:endParaRPr lang="en-US" sz="950" dirty="0"/>
           </a:p>
           <a:p>
-            <a:pPr algn="ctr" indent="0" marL="0">
+            <a:pPr marL="0" indent="0" algn="ctr">
               <a:buNone/>
             </a:pPr>
             <a:r>
@@ -5669,6 +5640,13 @@
             <a:prstDash val="solid"/>
           </a:ln>
         </p:spPr>
+        <p:txBody>
+          <a:bodyPr/>
+          <a:lstStyle/>
+          <a:p>
+            <a:endParaRPr lang="en-BE"/>
+          </a:p>
+        </p:txBody>
       </p:sp>
       <p:sp>
         <p:nvSpPr>
@@ -5694,6 +5672,13 @@
             <a:prstDash val="solid"/>
           </a:ln>
         </p:spPr>
+        <p:txBody>
+          <a:bodyPr/>
+          <a:lstStyle/>
+          <a:p>
+            <a:endParaRPr lang="en-BE"/>
+          </a:p>
+        </p:txBody>
       </p:sp>
       <p:sp>
         <p:nvSpPr>
@@ -5716,7 +5701,7 @@
           <a:bodyPr wrap="square" lIns="0" tIns="0" rIns="0" bIns="0" rtlCol="0" anchor="ctr"/>
           <a:lstStyle/>
           <a:p>
-            <a:pPr algn="ctr" indent="0" marL="0">
+            <a:pPr marL="0" indent="0" algn="ctr">
               <a:buNone/>
             </a:pPr>
             <a:r>
@@ -5733,7 +5718,7 @@
             <a:endParaRPr lang="en-US" sz="950" dirty="0"/>
           </a:p>
           <a:p>
-            <a:pPr algn="ctr" indent="0" marL="0">
+            <a:pPr marL="0" indent="0" algn="ctr">
               <a:buNone/>
             </a:pPr>
             <a:r>
@@ -5775,6 +5760,13 @@
             <a:prstDash val="solid"/>
           </a:ln>
         </p:spPr>
+        <p:txBody>
+          <a:bodyPr/>
+          <a:lstStyle/>
+          <a:p>
+            <a:endParaRPr lang="en-BE"/>
+          </a:p>
+        </p:txBody>
       </p:sp>
       <p:sp>
         <p:nvSpPr>
@@ -5800,6 +5792,13 @@
             <a:prstDash val="solid"/>
           </a:ln>
         </p:spPr>
+        <p:txBody>
+          <a:bodyPr/>
+          <a:lstStyle/>
+          <a:p>
+            <a:endParaRPr lang="en-BE"/>
+          </a:p>
+        </p:txBody>
       </p:sp>
       <p:sp>
         <p:nvSpPr>
@@ -5822,7 +5821,7 @@
           <a:bodyPr wrap="square" lIns="0" tIns="0" rIns="0" bIns="0" rtlCol="0" anchor="ctr"/>
           <a:lstStyle/>
           <a:p>
-            <a:pPr algn="ctr" indent="0" marL="0">
+            <a:pPr marL="0" indent="0" algn="ctr">
               <a:buNone/>
             </a:pPr>
             <a:r>
@@ -5839,7 +5838,7 @@
             <a:endParaRPr lang="en-US" sz="850" dirty="0"/>
           </a:p>
           <a:p>
-            <a:pPr algn="ctr" indent="0" marL="0">
+            <a:pPr marL="0" indent="0" algn="ctr">
               <a:buNone/>
             </a:pPr>
             <a:r>
@@ -5881,6 +5880,13 @@
             <a:prstDash val="solid"/>
           </a:ln>
         </p:spPr>
+        <p:txBody>
+          <a:bodyPr/>
+          <a:lstStyle/>
+          <a:p>
+            <a:endParaRPr lang="en-BE"/>
+          </a:p>
+        </p:txBody>
       </p:sp>
       <p:sp>
         <p:nvSpPr>
@@ -5903,7 +5909,7 @@
           <a:bodyPr wrap="square" lIns="0" tIns="0" rIns="0" bIns="0" rtlCol="0" anchor="ctr"/>
           <a:lstStyle/>
           <a:p>
-            <a:pPr indent="0" marL="0">
+            <a:pPr marL="0" indent="0">
               <a:buNone/>
             </a:pPr>
             <a:r>
@@ -5942,7 +5948,7 @@
           <a:bodyPr wrap="square" lIns="0" tIns="0" rIns="0" bIns="0" rtlCol="0" anchor="ctr"/>
           <a:lstStyle/>
           <a:p>
-            <a:pPr indent="0" marL="0">
+            <a:pPr marL="0" indent="0">
               <a:buNone/>
             </a:pPr>
             <a:r>
@@ -5984,6 +5990,13 @@
             <a:prstDash val="solid"/>
           </a:ln>
         </p:spPr>
+        <p:txBody>
+          <a:bodyPr/>
+          <a:lstStyle/>
+          <a:p>
+            <a:endParaRPr lang="en-BE"/>
+          </a:p>
+        </p:txBody>
       </p:sp>
       <p:sp>
         <p:nvSpPr>
@@ -6006,7 +6019,7 @@
           <a:bodyPr wrap="square" lIns="0" tIns="0" rIns="0" bIns="0" rtlCol="0" anchor="ctr"/>
           <a:lstStyle/>
           <a:p>
-            <a:pPr indent="0" marL="0">
+            <a:pPr marL="0" indent="0">
               <a:buNone/>
             </a:pPr>
             <a:r>
@@ -6045,7 +6058,7 @@
           <a:bodyPr wrap="square" lIns="0" tIns="0" rIns="0" bIns="0" rtlCol="0" anchor="ctr"/>
           <a:lstStyle/>
           <a:p>
-            <a:pPr indent="0" marL="0">
+            <a:pPr marL="0" indent="0">
               <a:buNone/>
             </a:pPr>
             <a:r>
@@ -6087,6 +6100,13 @@
             <a:prstDash val="solid"/>
           </a:ln>
         </p:spPr>
+        <p:txBody>
+          <a:bodyPr/>
+          <a:lstStyle/>
+          <a:p>
+            <a:endParaRPr lang="en-BE"/>
+          </a:p>
+        </p:txBody>
       </p:sp>
       <p:sp>
         <p:nvSpPr>
@@ -6109,7 +6129,7 @@
           <a:bodyPr wrap="square" lIns="0" tIns="0" rIns="0" bIns="0" rtlCol="0" anchor="ctr"/>
           <a:lstStyle/>
           <a:p>
-            <a:pPr indent="0" marL="0">
+            <a:pPr marL="0" indent="0">
               <a:buNone/>
             </a:pPr>
             <a:r>
@@ -6148,7 +6168,7 @@
           <a:bodyPr wrap="square" lIns="0" tIns="0" rIns="0" bIns="0" rtlCol="0" anchor="ctr"/>
           <a:lstStyle/>
           <a:p>
-            <a:pPr indent="0" marL="0">
+            <a:pPr marL="0" indent="0">
               <a:buNone/>
             </a:pPr>
             <a:r>
@@ -6190,6 +6210,13 @@
             <a:prstDash val="solid"/>
           </a:ln>
         </p:spPr>
+        <p:txBody>
+          <a:bodyPr/>
+          <a:lstStyle/>
+          <a:p>
+            <a:endParaRPr lang="en-BE"/>
+          </a:p>
+        </p:txBody>
       </p:sp>
       <p:sp>
         <p:nvSpPr>
@@ -6212,7 +6239,7 @@
           <a:bodyPr wrap="square" lIns="0" tIns="0" rIns="0" bIns="0" rtlCol="0" anchor="ctr"/>
           <a:lstStyle/>
           <a:p>
-            <a:pPr indent="0" marL="0">
+            <a:pPr marL="0" indent="0">
               <a:buNone/>
             </a:pPr>
             <a:r>
@@ -6251,7 +6278,7 @@
           <a:bodyPr wrap="square" lIns="0" tIns="0" rIns="0" bIns="0" rtlCol="0" anchor="ctr"/>
           <a:lstStyle/>
           <a:p>
-            <a:pPr indent="0" marL="0">
+            <a:pPr marL="0" indent="0">
               <a:buNone/>
             </a:pPr>
             <a:r>
@@ -6293,6 +6320,13 @@
             <a:prstDash val="solid"/>
           </a:ln>
         </p:spPr>
+        <p:txBody>
+          <a:bodyPr/>
+          <a:lstStyle/>
+          <a:p>
+            <a:endParaRPr lang="en-BE"/>
+          </a:p>
+        </p:txBody>
       </p:sp>
       <p:sp>
         <p:nvSpPr>
@@ -6315,7 +6349,7 @@
           <a:bodyPr wrap="square" lIns="0" tIns="0" rIns="0" bIns="0" rtlCol="0" anchor="ctr"/>
           <a:lstStyle/>
           <a:p>
-            <a:pPr indent="0" marL="0">
+            <a:pPr marL="0" indent="0">
               <a:buNone/>
             </a:pPr>
             <a:r>
@@ -6354,7 +6388,7 @@
           <a:bodyPr wrap="square" lIns="0" tIns="0" rIns="0" bIns="0" rtlCol="0" anchor="ctr"/>
           <a:lstStyle/>
           <a:p>
-            <a:pPr indent="0" marL="0">
+            <a:pPr marL="0" indent="0">
               <a:buNone/>
             </a:pPr>
             <a:r>
@@ -6388,6 +6422,7 @@
         <a:solidFill>
           <a:srgbClr val="FAF5EC"/>
         </a:solidFill>
+        <a:effectLst/>
       </p:bgPr>
     </p:bg>
     <p:spTree>
@@ -6428,6 +6463,13 @@
             <a:prstDash val="solid"/>
           </a:ln>
         </p:spPr>
+        <p:txBody>
+          <a:bodyPr/>
+          <a:lstStyle/>
+          <a:p>
+            <a:endParaRPr lang="en-BE"/>
+          </a:p>
+        </p:txBody>
       </p:sp>
       <p:sp>
         <p:nvSpPr>
@@ -6450,7 +6492,7 @@
           <a:bodyPr wrap="square" lIns="0" tIns="0" rIns="0" bIns="0" rtlCol="0" anchor="ctr"/>
           <a:lstStyle/>
           <a:p>
-            <a:pPr indent="0" marL="0">
+            <a:pPr marL="0" indent="0">
               <a:buNone/>
             </a:pPr>
             <a:r>
@@ -6489,7 +6531,7 @@
           <a:bodyPr wrap="square" lIns="0" tIns="0" rIns="0" bIns="0" rtlCol="0" anchor="ctr"/>
           <a:lstStyle/>
           <a:p>
-            <a:pPr indent="0" marL="0">
+            <a:pPr marL="0" indent="0">
               <a:buNone/>
             </a:pPr>
             <a:r>
@@ -6528,7 +6570,7 @@
           <a:bodyPr wrap="square" lIns="0" tIns="0" rIns="0" bIns="0" rtlCol="0" anchor="ctr"/>
           <a:lstStyle/>
           <a:p>
-            <a:pPr indent="0" marL="0">
+            <a:pPr marL="0" indent="0">
               <a:buNone/>
             </a:pPr>
             <a:r>
@@ -6570,6 +6612,13 @@
             <a:prstDash val="solid"/>
           </a:ln>
         </p:spPr>
+        <p:txBody>
+          <a:bodyPr/>
+          <a:lstStyle/>
+          <a:p>
+            <a:endParaRPr lang="en-BE"/>
+          </a:p>
+        </p:txBody>
       </p:sp>
       <p:sp>
         <p:nvSpPr>
@@ -6595,6 +6644,13 @@
             <a:prstDash val="solid"/>
           </a:ln>
         </p:spPr>
+        <p:txBody>
+          <a:bodyPr/>
+          <a:lstStyle/>
+          <a:p>
+            <a:endParaRPr lang="en-BE"/>
+          </a:p>
+        </p:txBody>
       </p:sp>
       <p:sp>
         <p:nvSpPr>
@@ -6620,6 +6676,13 @@
             <a:prstDash val="solid"/>
           </a:ln>
         </p:spPr>
+        <p:txBody>
+          <a:bodyPr/>
+          <a:lstStyle/>
+          <a:p>
+            <a:endParaRPr lang="en-BE"/>
+          </a:p>
+        </p:txBody>
       </p:sp>
       <p:sp>
         <p:nvSpPr>
@@ -6642,7 +6705,7 @@
           <a:bodyPr wrap="square" lIns="0" tIns="0" rIns="0" bIns="0" rtlCol="0" anchor="ctr"/>
           <a:lstStyle/>
           <a:p>
-            <a:pPr algn="ctr" indent="0" marL="0">
+            <a:pPr marL="0" indent="0" algn="ctr">
               <a:buNone/>
             </a:pPr>
             <a:r>
@@ -6681,7 +6744,7 @@
           <a:bodyPr wrap="square" lIns="0" tIns="0" rIns="0" bIns="0" rtlCol="0" anchor="ctr"/>
           <a:lstStyle/>
           <a:p>
-            <a:pPr indent="0" marL="0">
+            <a:pPr marL="0" indent="0">
               <a:buNone/>
             </a:pPr>
             <a:r>
@@ -6720,7 +6783,7 @@
           <a:bodyPr wrap="square" lIns="0" tIns="0" rIns="0" bIns="0" rtlCol="0" anchor="ctr"/>
           <a:lstStyle/>
           <a:p>
-            <a:pPr indent="0" marL="0">
+            <a:pPr marL="0" indent="0">
               <a:buNone/>
             </a:pPr>
             <a:r>
@@ -6759,7 +6822,7 @@
           <a:bodyPr wrap="square" lIns="0" tIns="0" rIns="0" bIns="0" rtlCol="0" anchor="ctr"/>
           <a:lstStyle/>
           <a:p>
-            <a:pPr indent="0" marL="0">
+            <a:pPr marL="0" indent="0">
               <a:buNone/>
             </a:pPr>
             <a:r>
@@ -6801,6 +6864,13 @@
             <a:prstDash val="solid"/>
           </a:ln>
         </p:spPr>
+        <p:txBody>
+          <a:bodyPr/>
+          <a:lstStyle/>
+          <a:p>
+            <a:endParaRPr lang="en-BE"/>
+          </a:p>
+        </p:txBody>
       </p:sp>
       <p:sp>
         <p:nvSpPr>
@@ -6826,6 +6896,13 @@
             <a:prstDash val="solid"/>
           </a:ln>
         </p:spPr>
+        <p:txBody>
+          <a:bodyPr/>
+          <a:lstStyle/>
+          <a:p>
+            <a:endParaRPr lang="en-BE"/>
+          </a:p>
+        </p:txBody>
       </p:sp>
       <p:sp>
         <p:nvSpPr>
@@ -6851,6 +6928,13 @@
             <a:prstDash val="solid"/>
           </a:ln>
         </p:spPr>
+        <p:txBody>
+          <a:bodyPr/>
+          <a:lstStyle/>
+          <a:p>
+            <a:endParaRPr lang="en-BE"/>
+          </a:p>
+        </p:txBody>
       </p:sp>
       <p:sp>
         <p:nvSpPr>
@@ -6873,7 +6957,7 @@
           <a:bodyPr wrap="square" lIns="0" tIns="0" rIns="0" bIns="0" rtlCol="0" anchor="ctr"/>
           <a:lstStyle/>
           <a:p>
-            <a:pPr algn="ctr" indent="0" marL="0">
+            <a:pPr marL="0" indent="0" algn="ctr">
               <a:buNone/>
             </a:pPr>
             <a:r>
@@ -6912,7 +6996,7 @@
           <a:bodyPr wrap="square" lIns="0" tIns="0" rIns="0" bIns="0" rtlCol="0" anchor="ctr"/>
           <a:lstStyle/>
           <a:p>
-            <a:pPr indent="0" marL="0">
+            <a:pPr marL="0" indent="0">
               <a:buNone/>
             </a:pPr>
             <a:r>
@@ -6951,7 +7035,7 @@
           <a:bodyPr wrap="square" lIns="0" tIns="0" rIns="0" bIns="0" rtlCol="0" anchor="ctr"/>
           <a:lstStyle/>
           <a:p>
-            <a:pPr indent="0" marL="0">
+            <a:pPr marL="0" indent="0">
               <a:buNone/>
             </a:pPr>
             <a:r>
@@ -6990,7 +7074,7 @@
           <a:bodyPr wrap="square" lIns="0" tIns="0" rIns="0" bIns="0" rtlCol="0" anchor="ctr"/>
           <a:lstStyle/>
           <a:p>
-            <a:pPr indent="0" marL="0">
+            <a:pPr marL="0" indent="0">
               <a:buNone/>
             </a:pPr>
             <a:r>
@@ -7032,6 +7116,13 @@
             <a:prstDash val="solid"/>
           </a:ln>
         </p:spPr>
+        <p:txBody>
+          <a:bodyPr/>
+          <a:lstStyle/>
+          <a:p>
+            <a:endParaRPr lang="en-BE"/>
+          </a:p>
+        </p:txBody>
       </p:sp>
       <p:sp>
         <p:nvSpPr>
@@ -7057,6 +7148,13 @@
             <a:prstDash val="solid"/>
           </a:ln>
         </p:spPr>
+        <p:txBody>
+          <a:bodyPr/>
+          <a:lstStyle/>
+          <a:p>
+            <a:endParaRPr lang="en-BE"/>
+          </a:p>
+        </p:txBody>
       </p:sp>
       <p:sp>
         <p:nvSpPr>
@@ -7082,6 +7180,13 @@
             <a:prstDash val="solid"/>
           </a:ln>
         </p:spPr>
+        <p:txBody>
+          <a:bodyPr/>
+          <a:lstStyle/>
+          <a:p>
+            <a:endParaRPr lang="en-BE"/>
+          </a:p>
+        </p:txBody>
       </p:sp>
       <p:sp>
         <p:nvSpPr>
@@ -7104,7 +7209,7 @@
           <a:bodyPr wrap="square" lIns="0" tIns="0" rIns="0" bIns="0" rtlCol="0" anchor="ctr"/>
           <a:lstStyle/>
           <a:p>
-            <a:pPr algn="ctr" indent="0" marL="0">
+            <a:pPr marL="0" indent="0" algn="ctr">
               <a:buNone/>
             </a:pPr>
             <a:r>
@@ -7143,7 +7248,7 @@
           <a:bodyPr wrap="square" lIns="0" tIns="0" rIns="0" bIns="0" rtlCol="0" anchor="ctr"/>
           <a:lstStyle/>
           <a:p>
-            <a:pPr indent="0" marL="0">
+            <a:pPr marL="0" indent="0">
               <a:buNone/>
             </a:pPr>
             <a:r>
@@ -7182,7 +7287,7 @@
           <a:bodyPr wrap="square" lIns="0" tIns="0" rIns="0" bIns="0" rtlCol="0" anchor="ctr"/>
           <a:lstStyle/>
           <a:p>
-            <a:pPr indent="0" marL="0">
+            <a:pPr marL="0" indent="0">
               <a:buNone/>
             </a:pPr>
             <a:r>
@@ -7221,7 +7326,7 @@
           <a:bodyPr wrap="square" lIns="0" tIns="0" rIns="0" bIns="0" rtlCol="0" anchor="ctr"/>
           <a:lstStyle/>
           <a:p>
-            <a:pPr indent="0" marL="0">
+            <a:pPr marL="0" indent="0">
               <a:buNone/>
             </a:pPr>
             <a:r>
@@ -7263,6 +7368,13 @@
             <a:prstDash val="solid"/>
           </a:ln>
         </p:spPr>
+        <p:txBody>
+          <a:bodyPr/>
+          <a:lstStyle/>
+          <a:p>
+            <a:endParaRPr lang="en-BE"/>
+          </a:p>
+        </p:txBody>
       </p:sp>
       <p:sp>
         <p:nvSpPr>
@@ -7288,6 +7400,13 @@
             <a:prstDash val="solid"/>
           </a:ln>
         </p:spPr>
+        <p:txBody>
+          <a:bodyPr/>
+          <a:lstStyle/>
+          <a:p>
+            <a:endParaRPr lang="en-BE"/>
+          </a:p>
+        </p:txBody>
       </p:sp>
       <p:sp>
         <p:nvSpPr>
@@ -7313,6 +7432,13 @@
             <a:prstDash val="solid"/>
           </a:ln>
         </p:spPr>
+        <p:txBody>
+          <a:bodyPr/>
+          <a:lstStyle/>
+          <a:p>
+            <a:endParaRPr lang="en-BE"/>
+          </a:p>
+        </p:txBody>
       </p:sp>
       <p:sp>
         <p:nvSpPr>
@@ -7335,7 +7461,7 @@
           <a:bodyPr wrap="square" lIns="0" tIns="0" rIns="0" bIns="0" rtlCol="0" anchor="ctr"/>
           <a:lstStyle/>
           <a:p>
-            <a:pPr algn="ctr" indent="0" marL="0">
+            <a:pPr marL="0" indent="0" algn="ctr">
               <a:buNone/>
             </a:pPr>
             <a:r>
@@ -7374,7 +7500,7 @@
           <a:bodyPr wrap="square" lIns="0" tIns="0" rIns="0" bIns="0" rtlCol="0" anchor="ctr"/>
           <a:lstStyle/>
           <a:p>
-            <a:pPr indent="0" marL="0">
+            <a:pPr marL="0" indent="0">
               <a:buNone/>
             </a:pPr>
             <a:r>
@@ -7413,7 +7539,7 @@
           <a:bodyPr wrap="square" lIns="0" tIns="0" rIns="0" bIns="0" rtlCol="0" anchor="ctr"/>
           <a:lstStyle/>
           <a:p>
-            <a:pPr indent="0" marL="0">
+            <a:pPr marL="0" indent="0">
               <a:buNone/>
             </a:pPr>
             <a:r>
@@ -7452,7 +7578,7 @@
           <a:bodyPr wrap="square" lIns="0" tIns="0" rIns="0" bIns="0" rtlCol="0" anchor="ctr"/>
           <a:lstStyle/>
           <a:p>
-            <a:pPr indent="0" marL="0">
+            <a:pPr marL="0" indent="0">
               <a:buNone/>
             </a:pPr>
             <a:r>
@@ -7486,6 +7612,7 @@
         <a:solidFill>
           <a:srgbClr val="FAF5EC"/>
         </a:solidFill>
+        <a:effectLst/>
       </p:bgPr>
     </p:bg>
     <p:spTree>
@@ -7526,6 +7653,13 @@
             <a:prstDash val="solid"/>
           </a:ln>
         </p:spPr>
+        <p:txBody>
+          <a:bodyPr/>
+          <a:lstStyle/>
+          <a:p>
+            <a:endParaRPr lang="en-BE"/>
+          </a:p>
+        </p:txBody>
       </p:sp>
       <p:sp>
         <p:nvSpPr>
@@ -7548,7 +7682,7 @@
           <a:bodyPr wrap="square" lIns="0" tIns="0" rIns="0" bIns="0" rtlCol="0" anchor="ctr"/>
           <a:lstStyle/>
           <a:p>
-            <a:pPr indent="0" marL="0">
+            <a:pPr marL="0" indent="0">
               <a:buNone/>
             </a:pPr>
             <a:r>
@@ -7587,7 +7721,7 @@
           <a:bodyPr wrap="square" lIns="0" tIns="0" rIns="0" bIns="0" rtlCol="0" anchor="ctr"/>
           <a:lstStyle/>
           <a:p>
-            <a:pPr indent="0" marL="0">
+            <a:pPr marL="0" indent="0">
               <a:buNone/>
             </a:pPr>
             <a:r>
@@ -7626,7 +7760,7 @@
           <a:bodyPr wrap="square" lIns="0" tIns="0" rIns="0" bIns="0" rtlCol="0" anchor="ctr"/>
           <a:lstStyle/>
           <a:p>
-            <a:pPr indent="0" marL="0">
+            <a:pPr marL="0" indent="0">
               <a:buNone/>
             </a:pPr>
             <a:r>
@@ -7668,6 +7802,13 @@
             <a:prstDash val="solid"/>
           </a:ln>
         </p:spPr>
+        <p:txBody>
+          <a:bodyPr/>
+          <a:lstStyle/>
+          <a:p>
+            <a:endParaRPr lang="en-BE"/>
+          </a:p>
+        </p:txBody>
       </p:sp>
       <p:sp>
         <p:nvSpPr>
@@ -7693,6 +7834,13 @@
             <a:prstDash val="solid"/>
           </a:ln>
         </p:spPr>
+        <p:txBody>
+          <a:bodyPr/>
+          <a:lstStyle/>
+          <a:p>
+            <a:endParaRPr lang="en-BE"/>
+          </a:p>
+        </p:txBody>
       </p:sp>
       <p:sp>
         <p:nvSpPr>
@@ -7715,7 +7863,7 @@
           <a:bodyPr wrap="square" lIns="0" tIns="0" rIns="0" bIns="0" rtlCol="0" anchor="ctr"/>
           <a:lstStyle/>
           <a:p>
-            <a:pPr indent="0" marL="0">
+            <a:pPr marL="0" indent="0">
               <a:buNone/>
             </a:pPr>
             <a:r>
@@ -7754,7 +7902,7 @@
           <a:bodyPr wrap="square" lIns="0" tIns="0" rIns="0" bIns="0" rtlCol="0" anchor="ctr"/>
           <a:lstStyle/>
           <a:p>
-            <a:pPr indent="0" marL="0">
+            <a:pPr marL="0" indent="0">
               <a:buNone/>
             </a:pPr>
             <a:r>
@@ -7796,6 +7944,13 @@
             <a:prstDash val="solid"/>
           </a:ln>
         </p:spPr>
+        <p:txBody>
+          <a:bodyPr/>
+          <a:lstStyle/>
+          <a:p>
+            <a:endParaRPr lang="en-BE"/>
+          </a:p>
+        </p:txBody>
       </p:sp>
       <p:sp>
         <p:nvSpPr>
@@ -7821,6 +7976,13 @@
             <a:prstDash val="solid"/>
           </a:ln>
         </p:spPr>
+        <p:txBody>
+          <a:bodyPr/>
+          <a:lstStyle/>
+          <a:p>
+            <a:endParaRPr lang="en-BE"/>
+          </a:p>
+        </p:txBody>
       </p:sp>
       <p:sp>
         <p:nvSpPr>
@@ -7843,7 +8005,7 @@
           <a:bodyPr wrap="square" lIns="0" tIns="0" rIns="0" bIns="0" rtlCol="0" anchor="ctr"/>
           <a:lstStyle/>
           <a:p>
-            <a:pPr indent="0" marL="0">
+            <a:pPr marL="0" indent="0">
               <a:buNone/>
             </a:pPr>
             <a:r>
@@ -7882,7 +8044,7 @@
           <a:bodyPr wrap="square" lIns="0" tIns="0" rIns="0" bIns="0" rtlCol="0" anchor="ctr"/>
           <a:lstStyle/>
           <a:p>
-            <a:pPr indent="0" marL="0">
+            <a:pPr marL="0" indent="0">
               <a:buNone/>
             </a:pPr>
             <a:r>
@@ -7924,6 +8086,13 @@
             <a:prstDash val="solid"/>
           </a:ln>
         </p:spPr>
+        <p:txBody>
+          <a:bodyPr/>
+          <a:lstStyle/>
+          <a:p>
+            <a:endParaRPr lang="en-BE"/>
+          </a:p>
+        </p:txBody>
       </p:sp>
       <p:sp>
         <p:nvSpPr>
@@ -7949,6 +8118,13 @@
             <a:prstDash val="solid"/>
           </a:ln>
         </p:spPr>
+        <p:txBody>
+          <a:bodyPr/>
+          <a:lstStyle/>
+          <a:p>
+            <a:endParaRPr lang="en-BE"/>
+          </a:p>
+        </p:txBody>
       </p:sp>
       <p:sp>
         <p:nvSpPr>
@@ -7971,7 +8147,7 @@
           <a:bodyPr wrap="square" lIns="0" tIns="0" rIns="0" bIns="0" rtlCol="0" anchor="ctr"/>
           <a:lstStyle/>
           <a:p>
-            <a:pPr indent="0" marL="0">
+            <a:pPr marL="0" indent="0">
               <a:buNone/>
             </a:pPr>
             <a:r>
@@ -8010,7 +8186,7 @@
           <a:bodyPr wrap="square" lIns="0" tIns="0" rIns="0" bIns="0" rtlCol="0" anchor="ctr"/>
           <a:lstStyle/>
           <a:p>
-            <a:pPr indent="0" marL="0">
+            <a:pPr marL="0" indent="0">
               <a:buNone/>
             </a:pPr>
             <a:r>
@@ -8052,6 +8228,13 @@
             <a:prstDash val="solid"/>
           </a:ln>
         </p:spPr>
+        <p:txBody>
+          <a:bodyPr/>
+          <a:lstStyle/>
+          <a:p>
+            <a:endParaRPr lang="en-BE"/>
+          </a:p>
+        </p:txBody>
       </p:sp>
       <p:sp>
         <p:nvSpPr>
@@ -8077,6 +8260,13 @@
             <a:prstDash val="solid"/>
           </a:ln>
         </p:spPr>
+        <p:txBody>
+          <a:bodyPr/>
+          <a:lstStyle/>
+          <a:p>
+            <a:endParaRPr lang="en-BE"/>
+          </a:p>
+        </p:txBody>
       </p:sp>
       <p:sp>
         <p:nvSpPr>
@@ -8099,7 +8289,7 @@
           <a:bodyPr wrap="square" lIns="0" tIns="0" rIns="0" bIns="0" rtlCol="0" anchor="ctr"/>
           <a:lstStyle/>
           <a:p>
-            <a:pPr indent="0" marL="0">
+            <a:pPr marL="0" indent="0">
               <a:buNone/>
             </a:pPr>
             <a:r>
@@ -8138,7 +8328,7 @@
           <a:bodyPr wrap="square" lIns="0" tIns="0" rIns="0" bIns="0" rtlCol="0" anchor="ctr"/>
           <a:lstStyle/>
           <a:p>
-            <a:pPr indent="0" marL="0">
+            <a:pPr marL="0" indent="0">
               <a:buNone/>
             </a:pPr>
             <a:r>
@@ -8180,6 +8370,13 @@
             <a:prstDash val="solid"/>
           </a:ln>
         </p:spPr>
+        <p:txBody>
+          <a:bodyPr/>
+          <a:lstStyle/>
+          <a:p>
+            <a:endParaRPr lang="en-BE"/>
+          </a:p>
+        </p:txBody>
       </p:sp>
       <p:sp>
         <p:nvSpPr>
@@ -8205,6 +8402,13 @@
             <a:prstDash val="solid"/>
           </a:ln>
         </p:spPr>
+        <p:txBody>
+          <a:bodyPr/>
+          <a:lstStyle/>
+          <a:p>
+            <a:endParaRPr lang="en-BE"/>
+          </a:p>
+        </p:txBody>
       </p:sp>
       <p:sp>
         <p:nvSpPr>
@@ -8227,7 +8431,7 @@
           <a:bodyPr wrap="square" lIns="0" tIns="0" rIns="0" bIns="0" rtlCol="0" anchor="ctr"/>
           <a:lstStyle/>
           <a:p>
-            <a:pPr indent="0" marL="0">
+            <a:pPr marL="0" indent="0">
               <a:buNone/>
             </a:pPr>
             <a:r>
@@ -8266,7 +8470,7 @@
           <a:bodyPr wrap="square" lIns="0" tIns="0" rIns="0" bIns="0" rtlCol="0" anchor="ctr"/>
           <a:lstStyle/>
           <a:p>
-            <a:pPr indent="0" marL="0">
+            <a:pPr marL="0" indent="0">
               <a:buNone/>
             </a:pPr>
             <a:r>
@@ -8308,6 +8512,13 @@
             <a:prstDash val="solid"/>
           </a:ln>
         </p:spPr>
+        <p:txBody>
+          <a:bodyPr/>
+          <a:lstStyle/>
+          <a:p>
+            <a:endParaRPr lang="en-BE"/>
+          </a:p>
+        </p:txBody>
       </p:sp>
       <p:sp>
         <p:nvSpPr>
@@ -8333,6 +8544,13 @@
             <a:prstDash val="solid"/>
           </a:ln>
         </p:spPr>
+        <p:txBody>
+          <a:bodyPr/>
+          <a:lstStyle/>
+          <a:p>
+            <a:endParaRPr lang="en-BE"/>
+          </a:p>
+        </p:txBody>
       </p:sp>
       <p:sp>
         <p:nvSpPr>
@@ -8355,7 +8573,7 @@
           <a:bodyPr wrap="square" lIns="0" tIns="0" rIns="0" bIns="0" rtlCol="0" anchor="ctr"/>
           <a:lstStyle/>
           <a:p>
-            <a:pPr indent="0" marL="0">
+            <a:pPr marL="0" indent="0">
               <a:buNone/>
             </a:pPr>
             <a:r>
@@ -8394,7 +8612,7 @@
           <a:bodyPr wrap="square" lIns="0" tIns="0" rIns="0" bIns="0" rtlCol="0" anchor="ctr"/>
           <a:lstStyle/>
           <a:p>
-            <a:pPr indent="0" marL="0">
+            <a:pPr marL="0" indent="0">
               <a:buNone/>
             </a:pPr>
             <a:r>
@@ -8428,6 +8646,7 @@
         <a:solidFill>
           <a:srgbClr val="FAF5EC"/>
         </a:solidFill>
+        <a:effectLst/>
       </p:bgPr>
     </p:bg>
     <p:spTree>
@@ -8468,6 +8687,13 @@
             <a:prstDash val="solid"/>
           </a:ln>
         </p:spPr>
+        <p:txBody>
+          <a:bodyPr/>
+          <a:lstStyle/>
+          <a:p>
+            <a:endParaRPr lang="en-BE"/>
+          </a:p>
+        </p:txBody>
       </p:sp>
       <p:sp>
         <p:nvSpPr>
@@ -8490,7 +8716,7 @@
           <a:bodyPr wrap="square" lIns="0" tIns="0" rIns="0" bIns="0" rtlCol="0" anchor="ctr"/>
           <a:lstStyle/>
           <a:p>
-            <a:pPr indent="0" marL="0">
+            <a:pPr marL="0" indent="0">
               <a:buNone/>
             </a:pPr>
             <a:r>
@@ -8529,7 +8755,7 @@
           <a:bodyPr wrap="square" lIns="0" tIns="0" rIns="0" bIns="0" rtlCol="0" anchor="ctr"/>
           <a:lstStyle/>
           <a:p>
-            <a:pPr indent="0" marL="0">
+            <a:pPr marL="0" indent="0">
               <a:buNone/>
             </a:pPr>
             <a:r>
@@ -8571,6 +8797,13 @@
             <a:prstDash val="solid"/>
           </a:ln>
         </p:spPr>
+        <p:txBody>
+          <a:bodyPr/>
+          <a:lstStyle/>
+          <a:p>
+            <a:endParaRPr lang="en-BE"/>
+          </a:p>
+        </p:txBody>
       </p:sp>
       <p:sp>
         <p:nvSpPr>
@@ -8593,7 +8826,7 @@
           <a:bodyPr wrap="square" lIns="0" tIns="0" rIns="0" bIns="0" rtlCol="0" anchor="ctr"/>
           <a:lstStyle/>
           <a:p>
-            <a:pPr algn="ctr" indent="0" marL="0">
+            <a:pPr marL="0" indent="0" algn="ctr">
               <a:buNone/>
             </a:pPr>
             <a:r>
@@ -8783,6 +9016,13 @@
             <a:prstDash val="solid"/>
           </a:ln>
         </p:spPr>
+        <p:txBody>
+          <a:bodyPr/>
+          <a:lstStyle/>
+          <a:p>
+            <a:endParaRPr lang="en-BE"/>
+          </a:p>
+        </p:txBody>
       </p:sp>
       <p:sp>
         <p:nvSpPr>
@@ -8805,7 +9045,7 @@
           <a:bodyPr wrap="square" lIns="0" tIns="0" rIns="0" bIns="0" rtlCol="0" anchor="ctr"/>
           <a:lstStyle/>
           <a:p>
-            <a:pPr algn="ctr" indent="0" marL="0">
+            <a:pPr marL="0" indent="0" algn="ctr">
               <a:buNone/>
             </a:pPr>
             <a:r>
@@ -8847,6 +9087,13 @@
             <a:prstDash val="solid"/>
           </a:ln>
         </p:spPr>
+        <p:txBody>
+          <a:bodyPr/>
+          <a:lstStyle/>
+          <a:p>
+            <a:endParaRPr lang="en-BE"/>
+          </a:p>
+        </p:txBody>
       </p:sp>
       <p:sp>
         <p:nvSpPr>
@@ -8869,7 +9116,7 @@
           <a:bodyPr wrap="square" lIns="0" tIns="0" rIns="0" bIns="0" rtlCol="0" anchor="ctr"/>
           <a:lstStyle/>
           <a:p>
-            <a:pPr algn="ctr" indent="0" marL="0">
+            <a:pPr marL="0" indent="0" algn="ctr">
               <a:buNone/>
             </a:pPr>
             <a:r>
@@ -8908,7 +9155,7 @@
           <a:bodyPr wrap="square" lIns="0" tIns="0" rIns="0" bIns="0" rtlCol="0" anchor="ctr"/>
           <a:lstStyle/>
           <a:p>
-            <a:pPr indent="0" marL="0">
+            <a:pPr marL="0" indent="0">
               <a:buNone/>
             </a:pPr>
             <a:r>
@@ -8950,6 +9197,13 @@
             <a:prstDash val="solid"/>
           </a:ln>
         </p:spPr>
+        <p:txBody>
+          <a:bodyPr/>
+          <a:lstStyle/>
+          <a:p>
+            <a:endParaRPr lang="en-BE"/>
+          </a:p>
+        </p:txBody>
       </p:sp>
       <p:sp>
         <p:nvSpPr>
@@ -8972,7 +9226,7 @@
           <a:bodyPr wrap="square" lIns="0" tIns="0" rIns="0" bIns="0" rtlCol="0" anchor="ctr"/>
           <a:lstStyle/>
           <a:p>
-            <a:pPr algn="ctr" indent="0" marL="0">
+            <a:pPr marL="0" indent="0" algn="ctr">
               <a:buNone/>
             </a:pPr>
             <a:r>
@@ -9011,7 +9265,7 @@
           <a:bodyPr wrap="square" lIns="0" tIns="0" rIns="0" bIns="0" rtlCol="0" anchor="ctr"/>
           <a:lstStyle/>
           <a:p>
-            <a:pPr indent="0" marL="0">
+            <a:pPr marL="0" indent="0">
               <a:buNone/>
             </a:pPr>
             <a:r>
@@ -9023,7 +9277,7 @@
                 <a:ea typeface="Calibri" pitchFamily="34" charset="-122"/>
                 <a:cs typeface="Calibri" pitchFamily="34" charset="-120"/>
               </a:rPr>
-              <a:t>Leaflet kaart met markers en heatmap in MapPage</a:t>
+              <a:t>3D kaart met markers en heatmap in MapPage</a:t>
             </a:r>
             <a:endParaRPr lang="en-US" sz="950" dirty="0"/>
           </a:p>
@@ -9053,6 +9307,13 @@
             <a:prstDash val="solid"/>
           </a:ln>
         </p:spPr>
+        <p:txBody>
+          <a:bodyPr/>
+          <a:lstStyle/>
+          <a:p>
+            <a:endParaRPr lang="en-BE"/>
+          </a:p>
+        </p:txBody>
       </p:sp>
       <p:sp>
         <p:nvSpPr>
@@ -9075,7 +9336,7 @@
           <a:bodyPr wrap="square" lIns="0" tIns="0" rIns="0" bIns="0" rtlCol="0" anchor="ctr"/>
           <a:lstStyle/>
           <a:p>
-            <a:pPr algn="ctr" indent="0" marL="0">
+            <a:pPr marL="0" indent="0" algn="ctr">
               <a:buNone/>
             </a:pPr>
             <a:r>
@@ -9114,7 +9375,7 @@
           <a:bodyPr wrap="square" lIns="0" tIns="0" rIns="0" bIns="0" rtlCol="0" anchor="ctr"/>
           <a:lstStyle/>
           <a:p>
-            <a:pPr indent="0" marL="0">
+            <a:pPr marL="0" indent="0">
               <a:buNone/>
             </a:pPr>
             <a:r>
@@ -9126,7 +9387,29 @@
                 <a:ea typeface="Calibri" pitchFamily="34" charset="-122"/>
                 <a:cs typeface="Calibri" pitchFamily="34" charset="-120"/>
               </a:rPr>
-              <a:t>Framework 2 (Svelte of Vue) — WEBDEV2 vereiste</a:t>
+              <a:t>CDN: R2 – </a:t>
+            </a:r>
+            <a:r>
+              <a:rPr lang="en-US" sz="950" dirty="0" err="1">
+                <a:solidFill>
+                  <a:srgbClr val="4A3728"/>
+                </a:solidFill>
+                <a:latin typeface="Calibri" pitchFamily="34" charset="0"/>
+                <a:ea typeface="Calibri" pitchFamily="34" charset="-122"/>
+                <a:cs typeface="Calibri" pitchFamily="34" charset="-120"/>
+              </a:rPr>
+              <a:t>Initialisatie</a:t>
+            </a:r>
+            <a:r>
+              <a:rPr lang="en-US" sz="950">
+                <a:solidFill>
+                  <a:srgbClr val="4A3728"/>
+                </a:solidFill>
+                <a:latin typeface="Calibri" pitchFamily="34" charset="0"/>
+                <a:ea typeface="Calibri" pitchFamily="34" charset="-122"/>
+                <a:cs typeface="Calibri" pitchFamily="34" charset="-120"/>
+              </a:rPr>
+              <a:t>.</a:t>
             </a:r>
             <a:endParaRPr lang="en-US" sz="950" dirty="0"/>
           </a:p>
@@ -9156,6 +9439,13 @@
             <a:prstDash val="solid"/>
           </a:ln>
         </p:spPr>
+        <p:txBody>
+          <a:bodyPr/>
+          <a:lstStyle/>
+          <a:p>
+            <a:endParaRPr lang="en-BE"/>
+          </a:p>
+        </p:txBody>
       </p:sp>
       <p:sp>
         <p:nvSpPr>
@@ -9178,7 +9468,7 @@
           <a:bodyPr wrap="square" lIns="0" tIns="0" rIns="0" bIns="0" rtlCol="0" anchor="ctr"/>
           <a:lstStyle/>
           <a:p>
-            <a:pPr algn="ctr" indent="0" marL="0">
+            <a:pPr marL="0" indent="0" algn="ctr">
               <a:buNone/>
             </a:pPr>
             <a:r>
@@ -9217,7 +9507,7 @@
           <a:bodyPr wrap="square" lIns="0" tIns="0" rIns="0" bIns="0" rtlCol="0" anchor="ctr"/>
           <a:lstStyle/>
           <a:p>
-            <a:pPr indent="0" marL="0">
+            <a:pPr marL="0" indent="0">
               <a:buNone/>
             </a:pPr>
             <a:r>
@@ -9259,6 +9549,13 @@
             <a:prstDash val="solid"/>
           </a:ln>
         </p:spPr>
+        <p:txBody>
+          <a:bodyPr/>
+          <a:lstStyle/>
+          <a:p>
+            <a:endParaRPr lang="en-BE"/>
+          </a:p>
+        </p:txBody>
       </p:sp>
       <p:sp>
         <p:nvSpPr>
@@ -9281,7 +9578,7 @@
           <a:bodyPr wrap="square" lIns="0" tIns="0" rIns="0" bIns="0" rtlCol="0" anchor="ctr"/>
           <a:lstStyle/>
           <a:p>
-            <a:pPr algn="ctr" indent="0" marL="0">
+            <a:pPr marL="0" indent="0" algn="ctr">
               <a:buNone/>
             </a:pPr>
             <a:r>
@@ -9320,7 +9617,7 @@
           <a:bodyPr wrap="square" lIns="0" tIns="0" rIns="0" bIns="0" rtlCol="0" anchor="ctr"/>
           <a:lstStyle/>
           <a:p>
-            <a:pPr indent="0" marL="0">
+            <a:pPr marL="0" indent="0">
               <a:buNone/>
             </a:pPr>
             <a:r>
@@ -9362,6 +9659,13 @@
             <a:prstDash val="solid"/>
           </a:ln>
         </p:spPr>
+        <p:txBody>
+          <a:bodyPr/>
+          <a:lstStyle/>
+          <a:p>
+            <a:endParaRPr lang="en-BE"/>
+          </a:p>
+        </p:txBody>
       </p:sp>
       <p:sp>
         <p:nvSpPr>
@@ -9384,7 +9688,7 @@
           <a:bodyPr wrap="square" lIns="0" tIns="0" rIns="0" bIns="0" rtlCol="0" anchor="ctr"/>
           <a:lstStyle/>
           <a:p>
-            <a:pPr algn="ctr" indent="0" marL="0">
+            <a:pPr marL="0" indent="0" algn="ctr">
               <a:buNone/>
             </a:pPr>
             <a:r>
@@ -9423,7 +9727,7 @@
           <a:bodyPr wrap="square" lIns="0" tIns="0" rIns="0" bIns="0" rtlCol="0" anchor="ctr"/>
           <a:lstStyle/>
           <a:p>
-            <a:pPr indent="0" marL="0">
+            <a:pPr marL="0" indent="0">
               <a:buNone/>
             </a:pPr>
             <a:r>
@@ -9465,6 +9769,13 @@
             <a:prstDash val="solid"/>
           </a:ln>
         </p:spPr>
+        <p:txBody>
+          <a:bodyPr/>
+          <a:lstStyle/>
+          <a:p>
+            <a:endParaRPr lang="en-BE"/>
+          </a:p>
+        </p:txBody>
       </p:sp>
       <p:sp>
         <p:nvSpPr>
@@ -9487,7 +9798,7 @@
           <a:bodyPr wrap="square" lIns="0" tIns="0" rIns="0" bIns="0" rtlCol="0" anchor="ctr"/>
           <a:lstStyle/>
           <a:p>
-            <a:pPr algn="ctr" indent="0" marL="0">
+            <a:pPr marL="0" indent="0" algn="ctr">
               <a:buNone/>
             </a:pPr>
             <a:r>
@@ -9526,7 +9837,7 @@
           <a:bodyPr wrap="square" lIns="0" tIns="0" rIns="0" bIns="0" rtlCol="0" anchor="ctr"/>
           <a:lstStyle/>
           <a:p>
-            <a:pPr indent="0" marL="0">
+            <a:pPr marL="0" indent="0">
               <a:buNone/>
             </a:pPr>
             <a:r>
@@ -9560,6 +9871,7 @@
         <a:solidFill>
           <a:srgbClr val="1A1208"/>
         </a:solidFill>
+        <a:effectLst/>
       </p:bgPr>
     </p:bg>
     <p:spTree>
@@ -9602,6 +9914,13 @@
             <a:prstDash val="solid"/>
           </a:ln>
         </p:spPr>
+        <p:txBody>
+          <a:bodyPr/>
+          <a:lstStyle/>
+          <a:p>
+            <a:endParaRPr lang="en-BE"/>
+          </a:p>
+        </p:txBody>
       </p:sp>
       <p:sp>
         <p:nvSpPr>
@@ -9627,6 +9946,13 @@
             <a:prstDash val="solid"/>
           </a:ln>
         </p:spPr>
+        <p:txBody>
+          <a:bodyPr/>
+          <a:lstStyle/>
+          <a:p>
+            <a:endParaRPr lang="en-BE"/>
+          </a:p>
+        </p:txBody>
       </p:sp>
       <p:sp>
         <p:nvSpPr>
@@ -9652,6 +9978,13 @@
             <a:prstDash val="solid"/>
           </a:ln>
         </p:spPr>
+        <p:txBody>
+          <a:bodyPr/>
+          <a:lstStyle/>
+          <a:p>
+            <a:endParaRPr lang="en-BE"/>
+          </a:p>
+        </p:txBody>
       </p:sp>
       <p:sp>
         <p:nvSpPr>
@@ -9674,7 +10007,7 @@
           <a:bodyPr wrap="square" lIns="0" tIns="0" rIns="0" bIns="0" rtlCol="0" anchor="ctr"/>
           <a:lstStyle/>
           <a:p>
-            <a:pPr algn="ctr" indent="0" marL="0">
+            <a:pPr marL="0" indent="0" algn="ctr">
               <a:buNone/>
             </a:pPr>
             <a:r>
@@ -9713,7 +10046,7 @@
           <a:bodyPr wrap="square" lIns="0" tIns="0" rIns="0" bIns="0" rtlCol="0" anchor="ctr"/>
           <a:lstStyle/>
           <a:p>
-            <a:pPr algn="ctr" indent="0" marL="0">
+            <a:pPr marL="0" indent="0" algn="ctr">
               <a:buNone/>
             </a:pPr>
             <a:r>
@@ -9752,7 +10085,7 @@
           <a:bodyPr wrap="square" lIns="0" tIns="0" rIns="0" bIns="0" rtlCol="0" anchor="ctr"/>
           <a:lstStyle/>
           <a:p>
-            <a:pPr algn="ctr" indent="0" marL="0">
+            <a:pPr marL="0" indent="0" algn="ctr">
               <a:buNone/>
             </a:pPr>
             <a:r>
@@ -9791,7 +10124,7 @@
           <a:bodyPr wrap="square" lIns="0" tIns="0" rIns="0" bIns="0" rtlCol="0" anchor="ctr"/>
           <a:lstStyle/>
           <a:p>
-            <a:pPr algn="ctr" indent="0" marL="0">
+            <a:pPr marL="0" indent="0" algn="ctr">
               <a:buNone/>
             </a:pPr>
             <a:r>
@@ -9830,7 +10163,7 @@
           <a:bodyPr wrap="square" lIns="0" tIns="0" rIns="0" bIns="0" rtlCol="0" anchor="ctr"/>
           <a:lstStyle/>
           <a:p>
-            <a:pPr algn="ctr" indent="0" marL="0">
+            <a:pPr marL="0" indent="0" algn="ctr">
               <a:buNone/>
             </a:pPr>
             <a:r>
@@ -9872,6 +10205,13 @@
             <a:prstDash val="solid"/>
           </a:ln>
         </p:spPr>
+        <p:txBody>
+          <a:bodyPr/>
+          <a:lstStyle/>
+          <a:p>
+            <a:endParaRPr lang="en-BE"/>
+          </a:p>
+        </p:txBody>
       </p:sp>
       <p:sp>
         <p:nvSpPr>
@@ -9894,7 +10234,7 @@
           <a:bodyPr wrap="square" lIns="0" tIns="0" rIns="0" bIns="0" rtlCol="0" anchor="ctr"/>
           <a:lstStyle/>
           <a:p>
-            <a:pPr algn="ctr" indent="0" marL="0">
+            <a:pPr marL="0" indent="0" algn="ctr">
               <a:buNone/>
             </a:pPr>
             <a:r>
@@ -9911,7 +10251,7 @@
             <a:endParaRPr lang="en-US" sz="950" dirty="0"/>
           </a:p>
           <a:p>
-            <a:pPr algn="ctr" indent="0" marL="0">
+            <a:pPr marL="0" indent="0" algn="ctr">
               <a:buNone/>
             </a:pPr>
             <a:r>
@@ -9953,6 +10293,13 @@
             <a:prstDash val="solid"/>
           </a:ln>
         </p:spPr>
+        <p:txBody>
+          <a:bodyPr/>
+          <a:lstStyle/>
+          <a:p>
+            <a:endParaRPr lang="en-BE"/>
+          </a:p>
+        </p:txBody>
       </p:sp>
       <p:sp>
         <p:nvSpPr>
@@ -9975,7 +10322,7 @@
           <a:bodyPr wrap="square" lIns="0" tIns="0" rIns="0" bIns="0" rtlCol="0" anchor="ctr"/>
           <a:lstStyle/>
           <a:p>
-            <a:pPr algn="ctr" indent="0" marL="0">
+            <a:pPr marL="0" indent="0" algn="ctr">
               <a:buNone/>
             </a:pPr>
             <a:r>
@@ -9992,7 +10339,7 @@
             <a:endParaRPr lang="en-US" sz="950" dirty="0"/>
           </a:p>
           <a:p>
-            <a:pPr algn="ctr" indent="0" marL="0">
+            <a:pPr marL="0" indent="0" algn="ctr">
               <a:buNone/>
             </a:pPr>
             <a:r>
@@ -10026,6 +10373,7 @@
         <a:solidFill>
           <a:srgbClr val="FAF5EC"/>
         </a:solidFill>
+        <a:effectLst/>
       </p:bgPr>
     </p:bg>
     <p:spTree>
@@ -10066,6 +10414,13 @@
             <a:prstDash val="solid"/>
           </a:ln>
         </p:spPr>
+        <p:txBody>
+          <a:bodyPr/>
+          <a:lstStyle/>
+          <a:p>
+            <a:endParaRPr lang="en-BE"/>
+          </a:p>
+        </p:txBody>
       </p:sp>
       <p:sp>
         <p:nvSpPr>
@@ -10088,7 +10443,7 @@
           <a:bodyPr wrap="square" lIns="0" tIns="0" rIns="0" bIns="0" rtlCol="0" anchor="ctr"/>
           <a:lstStyle/>
           <a:p>
-            <a:pPr indent="0" marL="0">
+            <a:pPr marL="0" indent="0">
               <a:buNone/>
             </a:pPr>
             <a:r>
@@ -10127,7 +10482,7 @@
           <a:bodyPr wrap="square" lIns="0" tIns="0" rIns="0" bIns="0" rtlCol="0" anchor="ctr"/>
           <a:lstStyle/>
           <a:p>
-            <a:pPr indent="0" marL="0">
+            <a:pPr marL="0" indent="0">
               <a:buNone/>
             </a:pPr>
             <a:r>
@@ -10169,6 +10524,13 @@
             <a:prstDash val="solid"/>
           </a:ln>
         </p:spPr>
+        <p:txBody>
+          <a:bodyPr/>
+          <a:lstStyle/>
+          <a:p>
+            <a:endParaRPr lang="en-BE"/>
+          </a:p>
+        </p:txBody>
       </p:sp>
       <p:sp>
         <p:nvSpPr>
@@ -10191,7 +10553,7 @@
           <a:bodyPr wrap="square" lIns="0" tIns="0" rIns="0" bIns="0" rtlCol="0" anchor="ctr"/>
           <a:lstStyle/>
           <a:p>
-            <a:pPr algn="ctr" indent="0" marL="0">
+            <a:pPr marL="0" indent="0" algn="ctr">
               <a:buNone/>
             </a:pPr>
             <a:r>
@@ -10230,7 +10592,7 @@
           <a:bodyPr wrap="square" lIns="0" tIns="0" rIns="0" bIns="0" rtlCol="0" anchor="ctr"/>
           <a:lstStyle/>
           <a:p>
-            <a:pPr indent="0" marL="0">
+            <a:pPr marL="0" indent="0">
               <a:buNone/>
             </a:pPr>
             <a:r>
@@ -10272,6 +10634,13 @@
             <a:prstDash val="solid"/>
           </a:ln>
         </p:spPr>
+        <p:txBody>
+          <a:bodyPr/>
+          <a:lstStyle/>
+          <a:p>
+            <a:endParaRPr lang="en-BE"/>
+          </a:p>
+        </p:txBody>
       </p:sp>
       <p:sp>
         <p:nvSpPr>
@@ -10294,7 +10663,7 @@
           <a:bodyPr wrap="square" lIns="0" tIns="0" rIns="0" bIns="0" rtlCol="0" anchor="ctr"/>
           <a:lstStyle/>
           <a:p>
-            <a:pPr algn="ctr" indent="0" marL="0">
+            <a:pPr marL="0" indent="0" algn="ctr">
               <a:buNone/>
             </a:pPr>
             <a:r>
@@ -10333,7 +10702,7 @@
           <a:bodyPr wrap="square" lIns="0" tIns="0" rIns="0" bIns="0" rtlCol="0" anchor="ctr"/>
           <a:lstStyle/>
           <a:p>
-            <a:pPr indent="0" marL="0">
+            <a:pPr marL="0" indent="0">
               <a:buNone/>
             </a:pPr>
             <a:r>
@@ -10375,6 +10744,13 @@
             <a:prstDash val="solid"/>
           </a:ln>
         </p:spPr>
+        <p:txBody>
+          <a:bodyPr/>
+          <a:lstStyle/>
+          <a:p>
+            <a:endParaRPr lang="en-BE"/>
+          </a:p>
+        </p:txBody>
       </p:sp>
       <p:sp>
         <p:nvSpPr>
@@ -10397,7 +10773,7 @@
           <a:bodyPr wrap="square" lIns="0" tIns="0" rIns="0" bIns="0" rtlCol="0" anchor="ctr"/>
           <a:lstStyle/>
           <a:p>
-            <a:pPr algn="ctr" indent="0" marL="0">
+            <a:pPr marL="0" indent="0" algn="ctr">
               <a:buNone/>
             </a:pPr>
             <a:r>
@@ -10436,7 +10812,7 @@
           <a:bodyPr wrap="square" lIns="0" tIns="0" rIns="0" bIns="0" rtlCol="0" anchor="ctr"/>
           <a:lstStyle/>
           <a:p>
-            <a:pPr indent="0" marL="0">
+            <a:pPr marL="0" indent="0">
               <a:buNone/>
             </a:pPr>
             <a:r>
@@ -10478,6 +10854,13 @@
             <a:prstDash val="solid"/>
           </a:ln>
         </p:spPr>
+        <p:txBody>
+          <a:bodyPr/>
+          <a:lstStyle/>
+          <a:p>
+            <a:endParaRPr lang="en-BE"/>
+          </a:p>
+        </p:txBody>
       </p:sp>
       <p:sp>
         <p:nvSpPr>
@@ -10500,7 +10883,7 @@
           <a:bodyPr wrap="square" lIns="0" tIns="0" rIns="0" bIns="0" rtlCol="0" anchor="ctr"/>
           <a:lstStyle/>
           <a:p>
-            <a:pPr algn="ctr" indent="0" marL="0">
+            <a:pPr marL="0" indent="0" algn="ctr">
               <a:buNone/>
             </a:pPr>
             <a:r>
@@ -10539,7 +10922,7 @@
           <a:bodyPr wrap="square" lIns="0" tIns="0" rIns="0" bIns="0" rtlCol="0" anchor="ctr"/>
           <a:lstStyle/>
           <a:p>
-            <a:pPr indent="0" marL="0">
+            <a:pPr marL="0" indent="0">
               <a:buNone/>
             </a:pPr>
             <a:r>
@@ -10581,6 +10964,13 @@
             <a:prstDash val="solid"/>
           </a:ln>
         </p:spPr>
+        <p:txBody>
+          <a:bodyPr/>
+          <a:lstStyle/>
+          <a:p>
+            <a:endParaRPr lang="en-BE"/>
+          </a:p>
+        </p:txBody>
       </p:sp>
       <p:sp>
         <p:nvSpPr>
@@ -10603,7 +10993,7 @@
           <a:bodyPr wrap="square" lIns="0" tIns="0" rIns="0" bIns="0" rtlCol="0" anchor="ctr"/>
           <a:lstStyle/>
           <a:p>
-            <a:pPr algn="ctr" indent="0" marL="0">
+            <a:pPr marL="0" indent="0" algn="ctr">
               <a:buNone/>
             </a:pPr>
             <a:r>
@@ -10642,7 +11032,7 @@
           <a:bodyPr wrap="square" lIns="0" tIns="0" rIns="0" bIns="0" rtlCol="0" anchor="ctr"/>
           <a:lstStyle/>
           <a:p>
-            <a:pPr indent="0" marL="0">
+            <a:pPr marL="0" indent="0">
               <a:buNone/>
             </a:pPr>
             <a:r>
@@ -10684,6 +11074,13 @@
             <a:prstDash val="solid"/>
           </a:ln>
         </p:spPr>
+        <p:txBody>
+          <a:bodyPr/>
+          <a:lstStyle/>
+          <a:p>
+            <a:endParaRPr lang="en-BE"/>
+          </a:p>
+        </p:txBody>
       </p:sp>
       <p:sp>
         <p:nvSpPr>
@@ -10706,7 +11103,7 @@
           <a:bodyPr wrap="square" lIns="0" tIns="0" rIns="0" bIns="0" rtlCol="0" anchor="ctr"/>
           <a:lstStyle/>
           <a:p>
-            <a:pPr algn="ctr" indent="0" marL="0">
+            <a:pPr marL="0" indent="0" algn="ctr">
               <a:buNone/>
             </a:pPr>
             <a:r>
@@ -10745,7 +11142,7 @@
           <a:bodyPr wrap="square" lIns="0" tIns="0" rIns="0" bIns="0" rtlCol="0" anchor="ctr"/>
           <a:lstStyle/>
           <a:p>
-            <a:pPr indent="0" marL="0">
+            <a:pPr marL="0" indent="0">
               <a:buNone/>
             </a:pPr>
             <a:r>
@@ -10787,6 +11184,13 @@
             <a:prstDash val="solid"/>
           </a:ln>
         </p:spPr>
+        <p:txBody>
+          <a:bodyPr/>
+          <a:lstStyle/>
+          <a:p>
+            <a:endParaRPr lang="en-BE"/>
+          </a:p>
+        </p:txBody>
       </p:sp>
       <p:sp>
         <p:nvSpPr>
@@ -10809,7 +11213,7 @@
           <a:bodyPr wrap="square" lIns="0" tIns="0" rIns="0" bIns="0" rtlCol="0" anchor="ctr"/>
           <a:lstStyle/>
           <a:p>
-            <a:pPr algn="ctr" indent="0" marL="0">
+            <a:pPr marL="0" indent="0" algn="ctr">
               <a:buNone/>
             </a:pPr>
             <a:r>
@@ -10848,7 +11252,7 @@
           <a:bodyPr wrap="square" lIns="0" tIns="0" rIns="0" bIns="0" rtlCol="0" anchor="ctr"/>
           <a:lstStyle/>
           <a:p>
-            <a:pPr indent="0" marL="0">
+            <a:pPr marL="0" indent="0">
               <a:buNone/>
             </a:pPr>
             <a:r>
@@ -10890,6 +11294,13 @@
             <a:prstDash val="solid"/>
           </a:ln>
         </p:spPr>
+        <p:txBody>
+          <a:bodyPr/>
+          <a:lstStyle/>
+          <a:p>
+            <a:endParaRPr lang="en-BE"/>
+          </a:p>
+        </p:txBody>
       </p:sp>
       <p:sp>
         <p:nvSpPr>
@@ -10912,7 +11323,7 @@
           <a:bodyPr wrap="square" lIns="0" tIns="0" rIns="0" bIns="0" rtlCol="0" anchor="ctr"/>
           <a:lstStyle/>
           <a:p>
-            <a:pPr algn="ctr" indent="0" marL="0">
+            <a:pPr marL="0" indent="0" algn="ctr">
               <a:buNone/>
             </a:pPr>
             <a:r>
@@ -10951,7 +11362,7 @@
           <a:bodyPr wrap="square" lIns="0" tIns="0" rIns="0" bIns="0" rtlCol="0" anchor="ctr"/>
           <a:lstStyle/>
           <a:p>
-            <a:pPr indent="0" marL="0">
+            <a:pPr marL="0" indent="0">
               <a:buNone/>
             </a:pPr>
             <a:r>
@@ -10985,6 +11396,7 @@
         <a:solidFill>
           <a:srgbClr val="FAF5EC"/>
         </a:solidFill>
+        <a:effectLst/>
       </p:bgPr>
     </p:bg>
     <p:spTree>
@@ -11025,6 +11437,13 @@
             <a:prstDash val="solid"/>
           </a:ln>
         </p:spPr>
+        <p:txBody>
+          <a:bodyPr/>
+          <a:lstStyle/>
+          <a:p>
+            <a:endParaRPr lang="en-BE"/>
+          </a:p>
+        </p:txBody>
       </p:sp>
       <p:sp>
         <p:nvSpPr>
@@ -11047,7 +11466,7 @@
           <a:bodyPr wrap="square" lIns="0" tIns="0" rIns="0" bIns="0" rtlCol="0" anchor="ctr"/>
           <a:lstStyle/>
           <a:p>
-            <a:pPr indent="0" marL="0">
+            <a:pPr marL="0" indent="0">
               <a:buNone/>
             </a:pPr>
             <a:r>
@@ -11086,7 +11505,7 @@
           <a:bodyPr wrap="square" lIns="0" tIns="0" rIns="0" bIns="0" rtlCol="0" anchor="ctr"/>
           <a:lstStyle/>
           <a:p>
-            <a:pPr indent="0" marL="0">
+            <a:pPr marL="0" indent="0">
               <a:buNone/>
             </a:pPr>
             <a:r>
@@ -11125,7 +11544,7 @@
           <a:bodyPr wrap="square" lIns="0" tIns="0" rIns="0" bIns="0" rtlCol="0" anchor="ctr"/>
           <a:lstStyle/>
           <a:p>
-            <a:pPr indent="0" marL="0">
+            <a:pPr marL="0" indent="0">
               <a:buNone/>
             </a:pPr>
             <a:r>
@@ -11167,6 +11586,13 @@
             <a:prstDash val="solid"/>
           </a:ln>
         </p:spPr>
+        <p:txBody>
+          <a:bodyPr/>
+          <a:lstStyle/>
+          <a:p>
+            <a:endParaRPr lang="en-BE"/>
+          </a:p>
+        </p:txBody>
       </p:sp>
       <p:sp>
         <p:nvSpPr>
@@ -11189,7 +11615,7 @@
           <a:bodyPr wrap="square" lIns="0" tIns="0" rIns="0" bIns="0" rtlCol="0" anchor="ctr"/>
           <a:lstStyle/>
           <a:p>
-            <a:pPr algn="ctr" indent="0" marL="0">
+            <a:pPr marL="0" indent="0" algn="ctr">
               <a:buNone/>
             </a:pPr>
             <a:r>
@@ -11421,6 +11847,13 @@
             <a:prstDash val="solid"/>
           </a:ln>
         </p:spPr>
+        <p:txBody>
+          <a:bodyPr/>
+          <a:lstStyle/>
+          <a:p>
+            <a:endParaRPr lang="en-BE"/>
+          </a:p>
+        </p:txBody>
       </p:sp>
       <p:sp>
         <p:nvSpPr>
@@ -11443,7 +11876,7 @@
           <a:bodyPr wrap="square" lIns="0" tIns="0" rIns="0" bIns="0" rtlCol="0" anchor="ctr"/>
           <a:lstStyle/>
           <a:p>
-            <a:pPr algn="ctr" indent="0" marL="0">
+            <a:pPr marL="0" indent="0" algn="ctr">
               <a:buNone/>
             </a:pPr>
             <a:r>
@@ -11667,6 +12100,7 @@
         <a:solidFill>
           <a:srgbClr val="FAF5EC"/>
         </a:solidFill>
+        <a:effectLst/>
       </p:bgPr>
     </p:bg>
     <p:spTree>
@@ -11707,6 +12141,13 @@
             <a:prstDash val="solid"/>
           </a:ln>
         </p:spPr>
+        <p:txBody>
+          <a:bodyPr/>
+          <a:lstStyle/>
+          <a:p>
+            <a:endParaRPr lang="en-BE"/>
+          </a:p>
+        </p:txBody>
       </p:sp>
       <p:sp>
         <p:nvSpPr>
@@ -11729,7 +12170,7 @@
           <a:bodyPr wrap="square" lIns="0" tIns="0" rIns="0" bIns="0" rtlCol="0" anchor="ctr"/>
           <a:lstStyle/>
           <a:p>
-            <a:pPr indent="0" marL="0">
+            <a:pPr marL="0" indent="0">
               <a:buNone/>
             </a:pPr>
             <a:r>
@@ -11768,7 +12209,7 @@
           <a:bodyPr wrap="square" lIns="0" tIns="0" rIns="0" bIns="0" rtlCol="0" anchor="ctr"/>
           <a:lstStyle/>
           <a:p>
-            <a:pPr indent="0" marL="0">
+            <a:pPr marL="0" indent="0">
               <a:buNone/>
             </a:pPr>
             <a:r>
@@ -11807,7 +12248,7 @@
           <a:bodyPr wrap="square" lIns="0" tIns="0" rIns="0" bIns="0" rtlCol="0" anchor="ctr"/>
           <a:lstStyle/>
           <a:p>
-            <a:pPr indent="0" marL="0">
+            <a:pPr marL="0" indent="0">
               <a:buNone/>
             </a:pPr>
             <a:r>
@@ -11849,6 +12290,13 @@
             <a:prstDash val="solid"/>
           </a:ln>
         </p:spPr>
+        <p:txBody>
+          <a:bodyPr/>
+          <a:lstStyle/>
+          <a:p>
+            <a:endParaRPr lang="en-BE"/>
+          </a:p>
+        </p:txBody>
       </p:sp>
       <p:sp>
         <p:nvSpPr>
@@ -11871,7 +12319,7 @@
           <a:bodyPr wrap="square" lIns="0" tIns="0" rIns="0" bIns="0" rtlCol="0" anchor="ctr"/>
           <a:lstStyle/>
           <a:p>
-            <a:pPr algn="ctr" indent="0" marL="0">
+            <a:pPr marL="0" indent="0" algn="ctr">
               <a:buNone/>
             </a:pPr>
             <a:r>
@@ -11910,7 +12358,7 @@
           <a:bodyPr wrap="square" lIns="0" tIns="0" rIns="0" bIns="0" rtlCol="0" anchor="ctr"/>
           <a:lstStyle/>
           <a:p>
-            <a:pPr algn="ctr" indent="0" marL="0">
+            <a:pPr marL="0" indent="0" algn="ctr">
               <a:buNone/>
             </a:pPr>
             <a:r>
@@ -11952,6 +12400,13 @@
             <a:prstDash val="solid"/>
           </a:ln>
         </p:spPr>
+        <p:txBody>
+          <a:bodyPr/>
+          <a:lstStyle/>
+          <a:p>
+            <a:endParaRPr lang="en-BE"/>
+          </a:p>
+        </p:txBody>
       </p:sp>
       <p:sp>
         <p:nvSpPr>
@@ -11974,7 +12429,7 @@
           <a:bodyPr wrap="square" lIns="0" tIns="0" rIns="0" bIns="0" rtlCol="0" anchor="ctr"/>
           <a:lstStyle/>
           <a:p>
-            <a:pPr algn="ctr" indent="0" marL="0">
+            <a:pPr marL="0" indent="0" algn="ctr">
               <a:buNone/>
             </a:pPr>
             <a:r>
@@ -12013,7 +12468,7 @@
           <a:bodyPr wrap="square" lIns="0" tIns="0" rIns="0" bIns="0" rtlCol="0" anchor="ctr"/>
           <a:lstStyle/>
           <a:p>
-            <a:pPr algn="ctr" indent="0" marL="0">
+            <a:pPr marL="0" indent="0" algn="ctr">
               <a:buNone/>
             </a:pPr>
             <a:r>
@@ -12055,6 +12510,13 @@
             <a:prstDash val="solid"/>
           </a:ln>
         </p:spPr>
+        <p:txBody>
+          <a:bodyPr/>
+          <a:lstStyle/>
+          <a:p>
+            <a:endParaRPr lang="en-BE"/>
+          </a:p>
+        </p:txBody>
       </p:sp>
       <p:sp>
         <p:nvSpPr>
@@ -12077,7 +12539,7 @@
           <a:bodyPr wrap="square" lIns="0" tIns="0" rIns="0" bIns="0" rtlCol="0" anchor="ctr"/>
           <a:lstStyle/>
           <a:p>
-            <a:pPr algn="ctr" indent="0" marL="0">
+            <a:pPr marL="0" indent="0" algn="ctr">
               <a:buNone/>
             </a:pPr>
             <a:r>
@@ -12116,7 +12578,7 @@
           <a:bodyPr wrap="square" lIns="0" tIns="0" rIns="0" bIns="0" rtlCol="0" anchor="ctr"/>
           <a:lstStyle/>
           <a:p>
-            <a:pPr algn="ctr" indent="0" marL="0">
+            <a:pPr marL="0" indent="0" algn="ctr">
               <a:buNone/>
             </a:pPr>
             <a:r>
@@ -12158,6 +12620,13 @@
             <a:prstDash val="solid"/>
           </a:ln>
         </p:spPr>
+        <p:txBody>
+          <a:bodyPr/>
+          <a:lstStyle/>
+          <a:p>
+            <a:endParaRPr lang="en-BE"/>
+          </a:p>
+        </p:txBody>
       </p:sp>
       <p:sp>
         <p:nvSpPr>
@@ -12180,7 +12649,7 @@
           <a:bodyPr wrap="square" lIns="0" tIns="0" rIns="0" bIns="0" rtlCol="0" anchor="ctr"/>
           <a:lstStyle/>
           <a:p>
-            <a:pPr algn="ctr" indent="0" marL="0">
+            <a:pPr marL="0" indent="0" algn="ctr">
               <a:buNone/>
             </a:pPr>
             <a:r>
@@ -12219,7 +12688,7 @@
           <a:bodyPr wrap="square" lIns="0" tIns="0" rIns="0" bIns="0" rtlCol="0" anchor="ctr"/>
           <a:lstStyle/>
           <a:p>
-            <a:pPr algn="ctr" indent="0" marL="0">
+            <a:pPr marL="0" indent="0" algn="ctr">
               <a:buNone/>
             </a:pPr>
             <a:r>
@@ -12261,6 +12730,13 @@
             <a:prstDash val="solid"/>
           </a:ln>
         </p:spPr>
+        <p:txBody>
+          <a:bodyPr/>
+          <a:lstStyle/>
+          <a:p>
+            <a:endParaRPr lang="en-BE"/>
+          </a:p>
+        </p:txBody>
       </p:sp>
       <p:sp>
         <p:nvSpPr>
@@ -12283,7 +12759,7 @@
           <a:bodyPr wrap="square" lIns="0" tIns="0" rIns="0" bIns="0" rtlCol="0" anchor="ctr"/>
           <a:lstStyle/>
           <a:p>
-            <a:pPr algn="ctr" indent="0" marL="0">
+            <a:pPr marL="0" indent="0" algn="ctr">
               <a:buNone/>
             </a:pPr>
             <a:r>
@@ -12322,7 +12798,7 @@
           <a:bodyPr wrap="square" lIns="0" tIns="0" rIns="0" bIns="0" rtlCol="0" anchor="ctr"/>
           <a:lstStyle/>
           <a:p>
-            <a:pPr algn="ctr" indent="0" marL="0">
+            <a:pPr marL="0" indent="0" algn="ctr">
               <a:buNone/>
             </a:pPr>
             <a:r>
@@ -12364,6 +12840,13 @@
             <a:prstDash val="solid"/>
           </a:ln>
         </p:spPr>
+        <p:txBody>
+          <a:bodyPr/>
+          <a:lstStyle/>
+          <a:p>
+            <a:endParaRPr lang="en-BE"/>
+          </a:p>
+        </p:txBody>
       </p:sp>
       <p:sp>
         <p:nvSpPr>
@@ -12386,7 +12869,7 @@
           <a:bodyPr wrap="square" lIns="0" tIns="0" rIns="0" bIns="0" rtlCol="0" anchor="ctr"/>
           <a:lstStyle/>
           <a:p>
-            <a:pPr algn="ctr" indent="0" marL="0">
+            <a:pPr marL="0" indent="0" algn="ctr">
               <a:buNone/>
             </a:pPr>
             <a:r>
@@ -12425,7 +12908,7 @@
           <a:bodyPr wrap="square" lIns="0" tIns="0" rIns="0" bIns="0" rtlCol="0" anchor="ctr"/>
           <a:lstStyle/>
           <a:p>
-            <a:pPr algn="ctr" indent="0" marL="0">
+            <a:pPr marL="0" indent="0" algn="ctr">
               <a:buNone/>
             </a:pPr>
             <a:r>
@@ -12464,7 +12947,7 @@
           <a:bodyPr wrap="square" lIns="0" tIns="0" rIns="0" bIns="0" rtlCol="0" anchor="ctr"/>
           <a:lstStyle/>
           <a:p>
-            <a:pPr algn="ctr" indent="0" marL="0">
+            <a:pPr marL="0" indent="0" algn="ctr">
               <a:buNone/>
             </a:pPr>
             <a:r>
@@ -12476,7 +12959,62 @@
                 <a:ea typeface="Calibri" pitchFamily="34" charset="-122"/>
                 <a:cs typeface="Calibri" pitchFamily="34" charset="-120"/>
               </a:rPr>
-              <a:t>Alle backend-werk is productie-deployed op api.sun-seeker.be · Frontend draait lokaal via Vite dev server</a:t>
+              <a:t>Alle backend-werk is productie-deployed op api.sun-seeker.be · Frontend </a:t>
+            </a:r>
+            <a:r>
+              <a:rPr lang="en-US" sz="900" i="1" dirty="0" err="1">
+                <a:solidFill>
+                  <a:srgbClr val="9B8570"/>
+                </a:solidFill>
+                <a:latin typeface="Calibri" pitchFamily="34" charset="0"/>
+                <a:ea typeface="Calibri" pitchFamily="34" charset="-122"/>
+                <a:cs typeface="Calibri" pitchFamily="34" charset="-120"/>
+              </a:rPr>
+              <a:t>draait</a:t>
+            </a:r>
+            <a:r>
+              <a:rPr lang="en-US" sz="900" i="1" dirty="0">
+                <a:solidFill>
+                  <a:srgbClr val="9B8570"/>
+                </a:solidFill>
+                <a:latin typeface="Calibri" pitchFamily="34" charset="0"/>
+                <a:ea typeface="Calibri" pitchFamily="34" charset="-122"/>
+                <a:cs typeface="Calibri" pitchFamily="34" charset="-120"/>
+              </a:rPr>
+              <a:t> via </a:t>
+            </a:r>
+            <a:r>
+              <a:rPr lang="en-US" sz="900" i="1" dirty="0" err="1">
+                <a:solidFill>
+                  <a:srgbClr val="9B8570"/>
+                </a:solidFill>
+                <a:latin typeface="Calibri" pitchFamily="34" charset="0"/>
+                <a:ea typeface="Calibri" pitchFamily="34" charset="-122"/>
+                <a:cs typeface="Calibri" pitchFamily="34" charset="-120"/>
+              </a:rPr>
+              <a:t>vercel</a:t>
+            </a:r>
+            <a:r>
+              <a:rPr lang="en-US" sz="900" i="1" dirty="0">
+                <a:solidFill>
+                  <a:srgbClr val="9B8570"/>
+                </a:solidFill>
+                <a:latin typeface="Calibri" pitchFamily="34" charset="0"/>
+                <a:ea typeface="Calibri" pitchFamily="34" charset="-122"/>
+                <a:cs typeface="Calibri" pitchFamily="34" charset="-120"/>
+              </a:rPr>
+              <a:t> op sun-</a:t>
+            </a:r>
+            <a:r>
+              <a:rPr lang="en-US" sz="900" i="1" dirty="0" err="1">
+                <a:solidFill>
+                  <a:srgbClr val="9B8570"/>
+                </a:solidFill>
+                <a:latin typeface="Calibri" pitchFamily="34" charset="0"/>
+                <a:ea typeface="Calibri" pitchFamily="34" charset="-122"/>
+                <a:cs typeface="Calibri" pitchFamily="34" charset="-120"/>
+              </a:rPr>
+              <a:t>seeker.be</a:t>
             </a:r>
             <a:endParaRPr lang="en-US" sz="900" dirty="0"/>
           </a:p>
@@ -12498,6 +13036,7 @@
         <a:solidFill>
           <a:srgbClr val="FAF5EC"/>
         </a:solidFill>
+        <a:effectLst/>
       </p:bgPr>
     </p:bg>
     <p:spTree>
@@ -12538,6 +13077,13 @@
             <a:prstDash val="solid"/>
           </a:ln>
         </p:spPr>
+        <p:txBody>
+          <a:bodyPr/>
+          <a:lstStyle/>
+          <a:p>
+            <a:endParaRPr lang="en-BE"/>
+          </a:p>
+        </p:txBody>
       </p:sp>
       <p:sp>
         <p:nvSpPr>
@@ -12560,7 +13106,7 @@
           <a:bodyPr wrap="square" lIns="0" tIns="0" rIns="0" bIns="0" rtlCol="0" anchor="ctr"/>
           <a:lstStyle/>
           <a:p>
-            <a:pPr indent="0" marL="0">
+            <a:pPr marL="0" indent="0">
               <a:buNone/>
             </a:pPr>
             <a:r>
@@ -12599,7 +13145,7 @@
           <a:bodyPr wrap="square" lIns="0" tIns="0" rIns="0" bIns="0" rtlCol="0" anchor="ctr"/>
           <a:lstStyle/>
           <a:p>
-            <a:pPr indent="0" marL="0">
+            <a:pPr marL="0" indent="0">
               <a:buNone/>
             </a:pPr>
             <a:r>
@@ -12638,7 +13184,7 @@
           <a:bodyPr wrap="square" lIns="0" tIns="0" rIns="0" bIns="0" rtlCol="0" anchor="ctr"/>
           <a:lstStyle/>
           <a:p>
-            <a:pPr indent="0" marL="0">
+            <a:pPr marL="0" indent="0">
               <a:buNone/>
             </a:pPr>
             <a:r>
@@ -12677,7 +13223,7 @@
           <a:bodyPr wrap="square" lIns="0" tIns="0" rIns="0" bIns="0" rtlCol="0" anchor="ctr"/>
           <a:lstStyle/>
           <a:p>
-            <a:pPr indent="0" marL="0">
+            <a:pPr marL="0" indent="0">
               <a:buNone/>
             </a:pPr>
             <a:r>
@@ -12719,6 +13265,13 @@
             <a:prstDash val="solid"/>
           </a:ln>
         </p:spPr>
+        <p:txBody>
+          <a:bodyPr/>
+          <a:lstStyle/>
+          <a:p>
+            <a:endParaRPr lang="en-BE"/>
+          </a:p>
+        </p:txBody>
       </p:sp>
       <p:sp>
         <p:nvSpPr>
@@ -12744,6 +13297,13 @@
             <a:prstDash val="solid"/>
           </a:ln>
         </p:spPr>
+        <p:txBody>
+          <a:bodyPr/>
+          <a:lstStyle/>
+          <a:p>
+            <a:endParaRPr lang="en-BE"/>
+          </a:p>
+        </p:txBody>
       </p:sp>
       <p:sp>
         <p:nvSpPr>
@@ -12766,7 +13326,7 @@
           <a:bodyPr wrap="square" lIns="0" tIns="0" rIns="0" bIns="0" rtlCol="0" anchor="ctr"/>
           <a:lstStyle/>
           <a:p>
-            <a:pPr indent="0" marL="0">
+            <a:pPr marL="0" indent="0">
               <a:buNone/>
             </a:pPr>
             <a:r>
@@ -12793,19 +13353,19 @@
         <p:spPr>
           <a:xfrm>
             <a:off x="365760" y="1700784"/>
-            <a:ext cx="3931920" cy="-18288"/>
-          </a:xfrm>
-          <a:prstGeom prst="rect">
-            <a:avLst/>
-          </a:prstGeom>
-          <a:noFill/>
-          <a:ln/>
-        </p:spPr>
-        <p:txBody>
-          <a:bodyPr wrap="square" lIns="0" tIns="0" rIns="0" bIns="0" rtlCol="0" anchor="ctr"/>
-          <a:lstStyle/>
-          <a:p>
-            <a:pPr indent="0" marL="0">
+            <a:ext cx="3931920" cy="0"/>
+          </a:xfrm>
+          <a:prstGeom prst="rect">
+            <a:avLst/>
+          </a:prstGeom>
+          <a:noFill/>
+          <a:ln/>
+        </p:spPr>
+        <p:txBody>
+          <a:bodyPr wrap="square" lIns="0" tIns="0" rIns="0" bIns="0" rtlCol="0" anchor="ctr"/>
+          <a:lstStyle/>
+          <a:p>
+            <a:pPr marL="0" indent="0">
               <a:buNone/>
             </a:pPr>
             <a:r>
@@ -12847,6 +13407,13 @@
             <a:prstDash val="solid"/>
           </a:ln>
         </p:spPr>
+        <p:txBody>
+          <a:bodyPr/>
+          <a:lstStyle/>
+          <a:p>
+            <a:endParaRPr lang="en-BE"/>
+          </a:p>
+        </p:txBody>
       </p:sp>
       <p:sp>
         <p:nvSpPr>
@@ -12872,6 +13439,13 @@
             <a:prstDash val="solid"/>
           </a:ln>
         </p:spPr>
+        <p:txBody>
+          <a:bodyPr/>
+          <a:lstStyle/>
+          <a:p>
+            <a:endParaRPr lang="en-BE"/>
+          </a:p>
+        </p:txBody>
       </p:sp>
       <p:sp>
         <p:nvSpPr>
@@ -12894,7 +13468,7 @@
           <a:bodyPr wrap="square" lIns="0" tIns="0" rIns="0" bIns="0" rtlCol="0" anchor="ctr"/>
           <a:lstStyle/>
           <a:p>
-            <a:pPr indent="0" marL="0">
+            <a:pPr marL="0" indent="0">
               <a:buNone/>
             </a:pPr>
             <a:r>
@@ -12921,19 +13495,19 @@
         <p:spPr>
           <a:xfrm>
             <a:off x="365760" y="2157984"/>
-            <a:ext cx="3931920" cy="-18288"/>
-          </a:xfrm>
-          <a:prstGeom prst="rect">
-            <a:avLst/>
-          </a:prstGeom>
-          <a:noFill/>
-          <a:ln/>
-        </p:spPr>
-        <p:txBody>
-          <a:bodyPr wrap="square" lIns="0" tIns="0" rIns="0" bIns="0" rtlCol="0" anchor="ctr"/>
-          <a:lstStyle/>
-          <a:p>
-            <a:pPr indent="0" marL="0">
+            <a:ext cx="3931920" cy="0"/>
+          </a:xfrm>
+          <a:prstGeom prst="rect">
+            <a:avLst/>
+          </a:prstGeom>
+          <a:noFill/>
+          <a:ln/>
+        </p:spPr>
+        <p:txBody>
+          <a:bodyPr wrap="square" lIns="0" tIns="0" rIns="0" bIns="0" rtlCol="0" anchor="ctr"/>
+          <a:lstStyle/>
+          <a:p>
+            <a:pPr marL="0" indent="0">
               <a:buNone/>
             </a:pPr>
             <a:r>
@@ -12975,6 +13549,13 @@
             <a:prstDash val="solid"/>
           </a:ln>
         </p:spPr>
+        <p:txBody>
+          <a:bodyPr/>
+          <a:lstStyle/>
+          <a:p>
+            <a:endParaRPr lang="en-BE"/>
+          </a:p>
+        </p:txBody>
       </p:sp>
       <p:sp>
         <p:nvSpPr>
@@ -13000,6 +13581,13 @@
             <a:prstDash val="solid"/>
           </a:ln>
         </p:spPr>
+        <p:txBody>
+          <a:bodyPr/>
+          <a:lstStyle/>
+          <a:p>
+            <a:endParaRPr lang="en-BE"/>
+          </a:p>
+        </p:txBody>
       </p:sp>
       <p:sp>
         <p:nvSpPr>
@@ -13022,7 +13610,7 @@
           <a:bodyPr wrap="square" lIns="0" tIns="0" rIns="0" bIns="0" rtlCol="0" anchor="ctr"/>
           <a:lstStyle/>
           <a:p>
-            <a:pPr indent="0" marL="0">
+            <a:pPr marL="0" indent="0">
               <a:buNone/>
             </a:pPr>
             <a:r>
@@ -13049,19 +13637,19 @@
         <p:spPr>
           <a:xfrm>
             <a:off x="365760" y="2615184"/>
-            <a:ext cx="3931920" cy="-18288"/>
-          </a:xfrm>
-          <a:prstGeom prst="rect">
-            <a:avLst/>
-          </a:prstGeom>
-          <a:noFill/>
-          <a:ln/>
-        </p:spPr>
-        <p:txBody>
-          <a:bodyPr wrap="square" lIns="0" tIns="0" rIns="0" bIns="0" rtlCol="0" anchor="ctr"/>
-          <a:lstStyle/>
-          <a:p>
-            <a:pPr indent="0" marL="0">
+            <a:ext cx="3931920" cy="0"/>
+          </a:xfrm>
+          <a:prstGeom prst="rect">
+            <a:avLst/>
+          </a:prstGeom>
+          <a:noFill/>
+          <a:ln/>
+        </p:spPr>
+        <p:txBody>
+          <a:bodyPr wrap="square" lIns="0" tIns="0" rIns="0" bIns="0" rtlCol="0" anchor="ctr"/>
+          <a:lstStyle/>
+          <a:p>
+            <a:pPr marL="0" indent="0">
               <a:buNone/>
             </a:pPr>
             <a:r>
@@ -13103,6 +13691,13 @@
             <a:prstDash val="solid"/>
           </a:ln>
         </p:spPr>
+        <p:txBody>
+          <a:bodyPr/>
+          <a:lstStyle/>
+          <a:p>
+            <a:endParaRPr lang="en-BE"/>
+          </a:p>
+        </p:txBody>
       </p:sp>
       <p:sp>
         <p:nvSpPr>
@@ -13128,6 +13723,13 @@
             <a:prstDash val="solid"/>
           </a:ln>
         </p:spPr>
+        <p:txBody>
+          <a:bodyPr/>
+          <a:lstStyle/>
+          <a:p>
+            <a:endParaRPr lang="en-BE"/>
+          </a:p>
+        </p:txBody>
       </p:sp>
       <p:sp>
         <p:nvSpPr>
@@ -13150,7 +13752,7 @@
           <a:bodyPr wrap="square" lIns="0" tIns="0" rIns="0" bIns="0" rtlCol="0" anchor="ctr"/>
           <a:lstStyle/>
           <a:p>
-            <a:pPr indent="0" marL="0">
+            <a:pPr marL="0" indent="0">
               <a:buNone/>
             </a:pPr>
             <a:r>
@@ -13177,19 +13779,19 @@
         <p:spPr>
           <a:xfrm>
             <a:off x="365760" y="3072384"/>
-            <a:ext cx="3931920" cy="-18288"/>
-          </a:xfrm>
-          <a:prstGeom prst="rect">
-            <a:avLst/>
-          </a:prstGeom>
-          <a:noFill/>
-          <a:ln/>
-        </p:spPr>
-        <p:txBody>
-          <a:bodyPr wrap="square" lIns="0" tIns="0" rIns="0" bIns="0" rtlCol="0" anchor="ctr"/>
-          <a:lstStyle/>
-          <a:p>
-            <a:pPr indent="0" marL="0">
+            <a:ext cx="3931920" cy="0"/>
+          </a:xfrm>
+          <a:prstGeom prst="rect">
+            <a:avLst/>
+          </a:prstGeom>
+          <a:noFill/>
+          <a:ln/>
+        </p:spPr>
+        <p:txBody>
+          <a:bodyPr wrap="square" lIns="0" tIns="0" rIns="0" bIns="0" rtlCol="0" anchor="ctr"/>
+          <a:lstStyle/>
+          <a:p>
+            <a:pPr marL="0" indent="0">
               <a:buNone/>
             </a:pPr>
             <a:r>
@@ -13231,6 +13833,13 @@
             <a:prstDash val="solid"/>
           </a:ln>
         </p:spPr>
+        <p:txBody>
+          <a:bodyPr/>
+          <a:lstStyle/>
+          <a:p>
+            <a:endParaRPr lang="en-BE"/>
+          </a:p>
+        </p:txBody>
       </p:sp>
       <p:sp>
         <p:nvSpPr>
@@ -13256,6 +13865,13 @@
             <a:prstDash val="solid"/>
           </a:ln>
         </p:spPr>
+        <p:txBody>
+          <a:bodyPr/>
+          <a:lstStyle/>
+          <a:p>
+            <a:endParaRPr lang="en-BE"/>
+          </a:p>
+        </p:txBody>
       </p:sp>
       <p:sp>
         <p:nvSpPr>
@@ -13278,7 +13894,7 @@
           <a:bodyPr wrap="square" lIns="0" tIns="0" rIns="0" bIns="0" rtlCol="0" anchor="ctr"/>
           <a:lstStyle/>
           <a:p>
-            <a:pPr indent="0" marL="0">
+            <a:pPr marL="0" indent="0">
               <a:buNone/>
             </a:pPr>
             <a:r>
@@ -13305,19 +13921,19 @@
         <p:spPr>
           <a:xfrm>
             <a:off x="365760" y="3529584"/>
-            <a:ext cx="3931920" cy="-18288"/>
-          </a:xfrm>
-          <a:prstGeom prst="rect">
-            <a:avLst/>
-          </a:prstGeom>
-          <a:noFill/>
-          <a:ln/>
-        </p:spPr>
-        <p:txBody>
-          <a:bodyPr wrap="square" lIns="0" tIns="0" rIns="0" bIns="0" rtlCol="0" anchor="ctr"/>
-          <a:lstStyle/>
-          <a:p>
-            <a:pPr indent="0" marL="0">
+            <a:ext cx="3931920" cy="0"/>
+          </a:xfrm>
+          <a:prstGeom prst="rect">
+            <a:avLst/>
+          </a:prstGeom>
+          <a:noFill/>
+          <a:ln/>
+        </p:spPr>
+        <p:txBody>
+          <a:bodyPr wrap="square" lIns="0" tIns="0" rIns="0" bIns="0" rtlCol="0" anchor="ctr"/>
+          <a:lstStyle/>
+          <a:p>
+            <a:pPr marL="0" indent="0">
               <a:buNone/>
             </a:pPr>
             <a:r>
@@ -13359,6 +13975,13 @@
             <a:prstDash val="solid"/>
           </a:ln>
         </p:spPr>
+        <p:txBody>
+          <a:bodyPr/>
+          <a:lstStyle/>
+          <a:p>
+            <a:endParaRPr lang="en-BE"/>
+          </a:p>
+        </p:txBody>
       </p:sp>
       <p:sp>
         <p:nvSpPr>
@@ -13384,6 +14007,13 @@
             <a:prstDash val="solid"/>
           </a:ln>
         </p:spPr>
+        <p:txBody>
+          <a:bodyPr/>
+          <a:lstStyle/>
+          <a:p>
+            <a:endParaRPr lang="en-BE"/>
+          </a:p>
+        </p:txBody>
       </p:sp>
       <p:sp>
         <p:nvSpPr>
@@ -13406,7 +14036,7 @@
           <a:bodyPr wrap="square" lIns="0" tIns="0" rIns="0" bIns="0" rtlCol="0" anchor="ctr"/>
           <a:lstStyle/>
           <a:p>
-            <a:pPr indent="0" marL="0">
+            <a:pPr marL="0" indent="0">
               <a:buNone/>
             </a:pPr>
             <a:r>
@@ -13433,19 +14063,19 @@
         <p:spPr>
           <a:xfrm>
             <a:off x="365760" y="3986784"/>
-            <a:ext cx="3931920" cy="-18288"/>
-          </a:xfrm>
-          <a:prstGeom prst="rect">
-            <a:avLst/>
-          </a:prstGeom>
-          <a:noFill/>
-          <a:ln/>
-        </p:spPr>
-        <p:txBody>
-          <a:bodyPr wrap="square" lIns="0" tIns="0" rIns="0" bIns="0" rtlCol="0" anchor="ctr"/>
-          <a:lstStyle/>
-          <a:p>
-            <a:pPr indent="0" marL="0">
+            <a:ext cx="3931920" cy="0"/>
+          </a:xfrm>
+          <a:prstGeom prst="rect">
+            <a:avLst/>
+          </a:prstGeom>
+          <a:noFill/>
+          <a:ln/>
+        </p:spPr>
+        <p:txBody>
+          <a:bodyPr wrap="square" lIns="0" tIns="0" rIns="0" bIns="0" rtlCol="0" anchor="ctr"/>
+          <a:lstStyle/>
+          <a:p>
+            <a:pPr marL="0" indent="0">
               <a:buNone/>
             </a:pPr>
             <a:r>
@@ -13487,6 +14117,13 @@
             <a:prstDash val="solid"/>
           </a:ln>
         </p:spPr>
+        <p:txBody>
+          <a:bodyPr/>
+          <a:lstStyle/>
+          <a:p>
+            <a:endParaRPr lang="en-BE"/>
+          </a:p>
+        </p:txBody>
       </p:sp>
       <p:sp>
         <p:nvSpPr>
@@ -13512,6 +14149,13 @@
             <a:prstDash val="solid"/>
           </a:ln>
         </p:spPr>
+        <p:txBody>
+          <a:bodyPr/>
+          <a:lstStyle/>
+          <a:p>
+            <a:endParaRPr lang="en-BE"/>
+          </a:p>
+        </p:txBody>
       </p:sp>
       <p:sp>
         <p:nvSpPr>
@@ -13534,7 +14178,7 @@
           <a:bodyPr wrap="square" lIns="0" tIns="0" rIns="0" bIns="0" rtlCol="0" anchor="ctr"/>
           <a:lstStyle/>
           <a:p>
-            <a:pPr indent="0" marL="0">
+            <a:pPr marL="0" indent="0">
               <a:buNone/>
             </a:pPr>
             <a:r>
@@ -13561,19 +14205,19 @@
         <p:spPr>
           <a:xfrm>
             <a:off x="365760" y="4443984"/>
-            <a:ext cx="3931920" cy="-18288"/>
-          </a:xfrm>
-          <a:prstGeom prst="rect">
-            <a:avLst/>
-          </a:prstGeom>
-          <a:noFill/>
-          <a:ln/>
-        </p:spPr>
-        <p:txBody>
-          <a:bodyPr wrap="square" lIns="0" tIns="0" rIns="0" bIns="0" rtlCol="0" anchor="ctr"/>
-          <a:lstStyle/>
-          <a:p>
-            <a:pPr indent="0" marL="0">
+            <a:ext cx="3931920" cy="0"/>
+          </a:xfrm>
+          <a:prstGeom prst="rect">
+            <a:avLst/>
+          </a:prstGeom>
+          <a:noFill/>
+          <a:ln/>
+        </p:spPr>
+        <p:txBody>
+          <a:bodyPr wrap="square" lIns="0" tIns="0" rIns="0" bIns="0" rtlCol="0" anchor="ctr"/>
+          <a:lstStyle/>
+          <a:p>
+            <a:pPr marL="0" indent="0">
               <a:buNone/>
             </a:pPr>
             <a:r>
@@ -13612,7 +14256,7 @@
           <a:bodyPr wrap="square" lIns="0" tIns="0" rIns="0" bIns="0" rtlCol="0" anchor="ctr"/>
           <a:lstStyle/>
           <a:p>
-            <a:pPr indent="0" marL="0">
+            <a:pPr marL="0" indent="0">
               <a:buNone/>
             </a:pPr>
             <a:r>
@@ -13654,6 +14298,13 @@
             <a:prstDash val="solid"/>
           </a:ln>
         </p:spPr>
+        <p:txBody>
+          <a:bodyPr/>
+          <a:lstStyle/>
+          <a:p>
+            <a:endParaRPr lang="en-BE"/>
+          </a:p>
+        </p:txBody>
       </p:sp>
       <p:sp>
         <p:nvSpPr>
@@ -13676,7 +14327,7 @@
           <a:bodyPr wrap="square" lIns="0" tIns="0" rIns="0" bIns="0" rtlCol="0" anchor="ctr"/>
           <a:lstStyle/>
           <a:p>
-            <a:pPr algn="ctr" indent="0" marL="0">
+            <a:pPr marL="0" indent="0" algn="ctr">
               <a:buNone/>
             </a:pPr>
             <a:r>
@@ -13715,7 +14366,7 @@
           <a:bodyPr wrap="square" lIns="0" tIns="0" rIns="0" bIns="0" rtlCol="0" anchor="ctr"/>
           <a:lstStyle/>
           <a:p>
-            <a:pPr algn="ctr" indent="0" marL="0">
+            <a:pPr marL="0" indent="0" algn="ctr">
               <a:buNone/>
             </a:pPr>
             <a:r>
@@ -13757,6 +14408,13 @@
             <a:prstDash val="solid"/>
           </a:ln>
         </p:spPr>
+        <p:txBody>
+          <a:bodyPr/>
+          <a:lstStyle/>
+          <a:p>
+            <a:endParaRPr lang="en-BE"/>
+          </a:p>
+        </p:txBody>
       </p:sp>
       <p:sp>
         <p:nvSpPr>
@@ -13779,7 +14437,7 @@
           <a:bodyPr wrap="square" lIns="0" tIns="0" rIns="0" bIns="0" rtlCol="0" anchor="ctr"/>
           <a:lstStyle/>
           <a:p>
-            <a:pPr algn="ctr" indent="0" marL="0">
+            <a:pPr marL="0" indent="0" algn="ctr">
               <a:buNone/>
             </a:pPr>
             <a:r>
@@ -13818,7 +14476,7 @@
           <a:bodyPr wrap="square" lIns="0" tIns="0" rIns="0" bIns="0" rtlCol="0" anchor="ctr"/>
           <a:lstStyle/>
           <a:p>
-            <a:pPr algn="ctr" indent="0" marL="0">
+            <a:pPr marL="0" indent="0" algn="ctr">
               <a:buNone/>
             </a:pPr>
             <a:r>
@@ -13860,6 +14518,13 @@
             <a:prstDash val="solid"/>
           </a:ln>
         </p:spPr>
+        <p:txBody>
+          <a:bodyPr/>
+          <a:lstStyle/>
+          <a:p>
+            <a:endParaRPr lang="en-BE"/>
+          </a:p>
+        </p:txBody>
       </p:sp>
       <p:sp>
         <p:nvSpPr>
@@ -13882,7 +14547,7 @@
           <a:bodyPr wrap="square" lIns="0" tIns="0" rIns="0" bIns="0" rtlCol="0" anchor="ctr"/>
           <a:lstStyle/>
           <a:p>
-            <a:pPr algn="ctr" indent="0" marL="0">
+            <a:pPr marL="0" indent="0" algn="ctr">
               <a:buNone/>
             </a:pPr>
             <a:r>
@@ -13921,7 +14586,7 @@
           <a:bodyPr wrap="square" lIns="0" tIns="0" rIns="0" bIns="0" rtlCol="0" anchor="ctr"/>
           <a:lstStyle/>
           <a:p>
-            <a:pPr algn="ctr" indent="0" marL="0">
+            <a:pPr marL="0" indent="0" algn="ctr">
               <a:buNone/>
             </a:pPr>
             <a:r>
@@ -13963,6 +14628,13 @@
             <a:prstDash val="solid"/>
           </a:ln>
         </p:spPr>
+        <p:txBody>
+          <a:bodyPr/>
+          <a:lstStyle/>
+          <a:p>
+            <a:endParaRPr lang="en-BE"/>
+          </a:p>
+        </p:txBody>
       </p:sp>
       <p:sp>
         <p:nvSpPr>
@@ -13985,7 +14657,7 @@
           <a:bodyPr wrap="square" lIns="0" tIns="0" rIns="0" bIns="0" rtlCol="0" anchor="ctr"/>
           <a:lstStyle/>
           <a:p>
-            <a:pPr algn="ctr" indent="0" marL="0">
+            <a:pPr marL="0" indent="0" algn="ctr">
               <a:buNone/>
             </a:pPr>
             <a:r>
@@ -14027,6 +14699,13 @@
             <a:prstDash val="solid"/>
           </a:ln>
         </p:spPr>
+        <p:txBody>
+          <a:bodyPr/>
+          <a:lstStyle/>
+          <a:p>
+            <a:endParaRPr lang="en-BE"/>
+          </a:p>
+        </p:txBody>
       </p:sp>
       <p:sp>
         <p:nvSpPr>
@@ -14049,7 +14728,7 @@
           <a:bodyPr wrap="square" lIns="0" tIns="0" rIns="0" bIns="0" rtlCol="0" anchor="ctr"/>
           <a:lstStyle/>
           <a:p>
-            <a:pPr algn="ctr" indent="0" marL="0">
+            <a:pPr marL="0" indent="0" algn="ctr">
               <a:buNone/>
             </a:pPr>
             <a:r>
@@ -14091,6 +14770,13 @@
             <a:prstDash val="solid"/>
           </a:ln>
         </p:spPr>
+        <p:txBody>
+          <a:bodyPr/>
+          <a:lstStyle/>
+          <a:p>
+            <a:endParaRPr lang="en-BE"/>
+          </a:p>
+        </p:txBody>
       </p:sp>
       <p:sp>
         <p:nvSpPr>
@@ -14113,7 +14799,7 @@
           <a:bodyPr wrap="square" lIns="0" tIns="0" rIns="0" bIns="0" rtlCol="0" anchor="ctr"/>
           <a:lstStyle/>
           <a:p>
-            <a:pPr algn="ctr" indent="0" marL="0">
+            <a:pPr marL="0" indent="0" algn="ctr">
               <a:buNone/>
             </a:pPr>
             <a:r>
@@ -14155,6 +14841,13 @@
             <a:prstDash val="solid"/>
           </a:ln>
         </p:spPr>
+        <p:txBody>
+          <a:bodyPr/>
+          <a:lstStyle/>
+          <a:p>
+            <a:endParaRPr lang="en-BE"/>
+          </a:p>
+        </p:txBody>
       </p:sp>
       <p:sp>
         <p:nvSpPr>
@@ -14177,7 +14870,7 @@
           <a:bodyPr wrap="square" lIns="0" tIns="0" rIns="0" bIns="0" rtlCol="0" anchor="ctr"/>
           <a:lstStyle/>
           <a:p>
-            <a:pPr algn="ctr" indent="0" marL="0">
+            <a:pPr marL="0" indent="0" algn="ctr">
               <a:buNone/>
             </a:pPr>
             <a:r>
@@ -14216,7 +14909,7 @@
           <a:bodyPr wrap="square" lIns="0" tIns="0" rIns="0" bIns="0" rtlCol="0" anchor="ctr"/>
           <a:lstStyle/>
           <a:p>
-            <a:pPr indent="0" marL="0">
+            <a:pPr marL="0" indent="0">
               <a:buNone/>
             </a:pPr>
             <a:r>
@@ -14255,7 +14948,7 @@
           <a:bodyPr wrap="square" lIns="0" tIns="0" rIns="0" bIns="0" rtlCol="0" anchor="ctr"/>
           <a:lstStyle/>
           <a:p>
-            <a:pPr indent="0" marL="0">
+            <a:pPr marL="0" indent="0">
               <a:buNone/>
             </a:pPr>
             <a:r>
@@ -14289,6 +14982,7 @@
         <a:solidFill>
           <a:srgbClr val="FAF5EC"/>
         </a:solidFill>
+        <a:effectLst/>
       </p:bgPr>
     </p:bg>
     <p:spTree>
@@ -14329,6 +15023,13 @@
             <a:prstDash val="solid"/>
           </a:ln>
         </p:spPr>
+        <p:txBody>
+          <a:bodyPr/>
+          <a:lstStyle/>
+          <a:p>
+            <a:endParaRPr lang="en-BE"/>
+          </a:p>
+        </p:txBody>
       </p:sp>
       <p:sp>
         <p:nvSpPr>
@@ -14351,7 +15052,7 @@
           <a:bodyPr wrap="square" lIns="0" tIns="0" rIns="0" bIns="0" rtlCol="0" anchor="ctr"/>
           <a:lstStyle/>
           <a:p>
-            <a:pPr indent="0" marL="0">
+            <a:pPr marL="0" indent="0">
               <a:buNone/>
             </a:pPr>
             <a:r>
@@ -14390,7 +15091,7 @@
           <a:bodyPr wrap="square" lIns="0" tIns="0" rIns="0" bIns="0" rtlCol="0" anchor="ctr"/>
           <a:lstStyle/>
           <a:p>
-            <a:pPr indent="0" marL="0">
+            <a:pPr marL="0" indent="0">
               <a:buNone/>
             </a:pPr>
             <a:r>
@@ -14429,7 +15130,7 @@
           <a:bodyPr wrap="square" lIns="0" tIns="0" rIns="0" bIns="0" rtlCol="0" anchor="ctr"/>
           <a:lstStyle/>
           <a:p>
-            <a:pPr indent="0" marL="0">
+            <a:pPr marL="0" indent="0">
               <a:buNone/>
             </a:pPr>
             <a:r>
@@ -14471,6 +15172,13 @@
             <a:prstDash val="solid"/>
           </a:ln>
         </p:spPr>
+        <p:txBody>
+          <a:bodyPr/>
+          <a:lstStyle/>
+          <a:p>
+            <a:endParaRPr lang="en-BE"/>
+          </a:p>
+        </p:txBody>
       </p:sp>
       <p:sp>
         <p:nvSpPr>
@@ -14496,6 +15204,13 @@
             <a:prstDash val="solid"/>
           </a:ln>
         </p:spPr>
+        <p:txBody>
+          <a:bodyPr/>
+          <a:lstStyle/>
+          <a:p>
+            <a:endParaRPr lang="en-BE"/>
+          </a:p>
+        </p:txBody>
       </p:sp>
       <p:sp>
         <p:nvSpPr>
@@ -14521,6 +15236,13 @@
             <a:prstDash val="solid"/>
           </a:ln>
         </p:spPr>
+        <p:txBody>
+          <a:bodyPr/>
+          <a:lstStyle/>
+          <a:p>
+            <a:endParaRPr lang="en-BE"/>
+          </a:p>
+        </p:txBody>
       </p:sp>
       <p:sp>
         <p:nvSpPr>
@@ -14543,7 +15265,7 @@
           <a:bodyPr wrap="square" lIns="0" tIns="0" rIns="0" bIns="0" rtlCol="0" anchor="ctr"/>
           <a:lstStyle/>
           <a:p>
-            <a:pPr algn="ctr" indent="0" marL="0">
+            <a:pPr marL="0" indent="0" algn="ctr">
               <a:buNone/>
             </a:pPr>
             <a:r>
@@ -14582,7 +15304,7 @@
           <a:bodyPr wrap="square" lIns="0" tIns="0" rIns="0" bIns="0" rtlCol="0" anchor="ctr"/>
           <a:lstStyle/>
           <a:p>
-            <a:pPr indent="0" marL="0">
+            <a:pPr marL="0" indent="0">
               <a:buNone/>
             </a:pPr>
             <a:r>
@@ -14621,7 +15343,7 @@
           <a:bodyPr wrap="square" lIns="0" tIns="0" rIns="0" bIns="0" rtlCol="0" anchor="ctr"/>
           <a:lstStyle/>
           <a:p>
-            <a:pPr indent="0" marL="0">
+            <a:pPr marL="0" indent="0">
               <a:buNone/>
             </a:pPr>
             <a:r>
@@ -14663,6 +15385,13 @@
             <a:prstDash val="solid"/>
           </a:ln>
         </p:spPr>
+        <p:txBody>
+          <a:bodyPr/>
+          <a:lstStyle/>
+          <a:p>
+            <a:endParaRPr lang="en-BE"/>
+          </a:p>
+        </p:txBody>
       </p:sp>
       <p:sp>
         <p:nvSpPr>
@@ -14688,6 +15417,13 @@
             <a:prstDash val="solid"/>
           </a:ln>
         </p:spPr>
+        <p:txBody>
+          <a:bodyPr/>
+          <a:lstStyle/>
+          <a:p>
+            <a:endParaRPr lang="en-BE"/>
+          </a:p>
+        </p:txBody>
       </p:sp>
       <p:sp>
         <p:nvSpPr>
@@ -14713,6 +15449,13 @@
             <a:prstDash val="solid"/>
           </a:ln>
         </p:spPr>
+        <p:txBody>
+          <a:bodyPr/>
+          <a:lstStyle/>
+          <a:p>
+            <a:endParaRPr lang="en-BE"/>
+          </a:p>
+        </p:txBody>
       </p:sp>
       <p:sp>
         <p:nvSpPr>
@@ -14735,7 +15478,7 @@
           <a:bodyPr wrap="square" lIns="0" tIns="0" rIns="0" bIns="0" rtlCol="0" anchor="ctr"/>
           <a:lstStyle/>
           <a:p>
-            <a:pPr algn="ctr" indent="0" marL="0">
+            <a:pPr marL="0" indent="0" algn="ctr">
               <a:buNone/>
             </a:pPr>
             <a:r>
@@ -14774,7 +15517,7 @@
           <a:bodyPr wrap="square" lIns="0" tIns="0" rIns="0" bIns="0" rtlCol="0" anchor="ctr"/>
           <a:lstStyle/>
           <a:p>
-            <a:pPr indent="0" marL="0">
+            <a:pPr marL="0" indent="0">
               <a:buNone/>
             </a:pPr>
             <a:r>
@@ -14813,7 +15556,7 @@
           <a:bodyPr wrap="square" lIns="0" tIns="0" rIns="0" bIns="0" rtlCol="0" anchor="ctr"/>
           <a:lstStyle/>
           <a:p>
-            <a:pPr indent="0" marL="0">
+            <a:pPr marL="0" indent="0">
               <a:buNone/>
             </a:pPr>
             <a:r>
@@ -14855,6 +15598,13 @@
             <a:prstDash val="solid"/>
           </a:ln>
         </p:spPr>
+        <p:txBody>
+          <a:bodyPr/>
+          <a:lstStyle/>
+          <a:p>
+            <a:endParaRPr lang="en-BE"/>
+          </a:p>
+        </p:txBody>
       </p:sp>
       <p:sp>
         <p:nvSpPr>
@@ -14880,6 +15630,13 @@
             <a:prstDash val="solid"/>
           </a:ln>
         </p:spPr>
+        <p:txBody>
+          <a:bodyPr/>
+          <a:lstStyle/>
+          <a:p>
+            <a:endParaRPr lang="en-BE"/>
+          </a:p>
+        </p:txBody>
       </p:sp>
       <p:sp>
         <p:nvSpPr>
@@ -14905,6 +15662,13 @@
             <a:prstDash val="solid"/>
           </a:ln>
         </p:spPr>
+        <p:txBody>
+          <a:bodyPr/>
+          <a:lstStyle/>
+          <a:p>
+            <a:endParaRPr lang="en-BE"/>
+          </a:p>
+        </p:txBody>
       </p:sp>
       <p:sp>
         <p:nvSpPr>
@@ -14927,7 +15691,7 @@
           <a:bodyPr wrap="square" lIns="0" tIns="0" rIns="0" bIns="0" rtlCol="0" anchor="ctr"/>
           <a:lstStyle/>
           <a:p>
-            <a:pPr algn="ctr" indent="0" marL="0">
+            <a:pPr marL="0" indent="0" algn="ctr">
               <a:buNone/>
             </a:pPr>
             <a:r>
@@ -14966,7 +15730,7 @@
           <a:bodyPr wrap="square" lIns="0" tIns="0" rIns="0" bIns="0" rtlCol="0" anchor="ctr"/>
           <a:lstStyle/>
           <a:p>
-            <a:pPr indent="0" marL="0">
+            <a:pPr marL="0" indent="0">
               <a:buNone/>
             </a:pPr>
             <a:r>
@@ -15005,7 +15769,7 @@
           <a:bodyPr wrap="square" lIns="0" tIns="0" rIns="0" bIns="0" rtlCol="0" anchor="ctr"/>
           <a:lstStyle/>
           <a:p>
-            <a:pPr indent="0" marL="0">
+            <a:pPr marL="0" indent="0">
               <a:buNone/>
             </a:pPr>
             <a:r>
@@ -15047,6 +15811,13 @@
             <a:prstDash val="solid"/>
           </a:ln>
         </p:spPr>
+        <p:txBody>
+          <a:bodyPr/>
+          <a:lstStyle/>
+          <a:p>
+            <a:endParaRPr lang="en-BE"/>
+          </a:p>
+        </p:txBody>
       </p:sp>
       <p:sp>
         <p:nvSpPr>
@@ -15072,6 +15843,13 @@
             <a:prstDash val="solid"/>
           </a:ln>
         </p:spPr>
+        <p:txBody>
+          <a:bodyPr/>
+          <a:lstStyle/>
+          <a:p>
+            <a:endParaRPr lang="en-BE"/>
+          </a:p>
+        </p:txBody>
       </p:sp>
       <p:sp>
         <p:nvSpPr>
@@ -15097,6 +15875,13 @@
             <a:prstDash val="solid"/>
           </a:ln>
         </p:spPr>
+        <p:txBody>
+          <a:bodyPr/>
+          <a:lstStyle/>
+          <a:p>
+            <a:endParaRPr lang="en-BE"/>
+          </a:p>
+        </p:txBody>
       </p:sp>
       <p:sp>
         <p:nvSpPr>
@@ -15119,7 +15904,7 @@
           <a:bodyPr wrap="square" lIns="0" tIns="0" rIns="0" bIns="0" rtlCol="0" anchor="ctr"/>
           <a:lstStyle/>
           <a:p>
-            <a:pPr algn="ctr" indent="0" marL="0">
+            <a:pPr marL="0" indent="0" algn="ctr">
               <a:buNone/>
             </a:pPr>
             <a:r>
@@ -15158,7 +15943,7 @@
           <a:bodyPr wrap="square" lIns="0" tIns="0" rIns="0" bIns="0" rtlCol="0" anchor="ctr"/>
           <a:lstStyle/>
           <a:p>
-            <a:pPr indent="0" marL="0">
+            <a:pPr marL="0" indent="0">
               <a:buNone/>
             </a:pPr>
             <a:r>
@@ -15197,7 +15982,7 @@
           <a:bodyPr wrap="square" lIns="0" tIns="0" rIns="0" bIns="0" rtlCol="0" anchor="ctr"/>
           <a:lstStyle/>
           <a:p>
-            <a:pPr indent="0" marL="0">
+            <a:pPr marL="0" indent="0">
               <a:buNone/>
             </a:pPr>
             <a:r>
@@ -15239,6 +16024,13 @@
             <a:prstDash val="solid"/>
           </a:ln>
         </p:spPr>
+        <p:txBody>
+          <a:bodyPr/>
+          <a:lstStyle/>
+          <a:p>
+            <a:endParaRPr lang="en-BE"/>
+          </a:p>
+        </p:txBody>
       </p:sp>
       <p:sp>
         <p:nvSpPr>
@@ -15264,6 +16056,13 @@
             <a:prstDash val="solid"/>
           </a:ln>
         </p:spPr>
+        <p:txBody>
+          <a:bodyPr/>
+          <a:lstStyle/>
+          <a:p>
+            <a:endParaRPr lang="en-BE"/>
+          </a:p>
+        </p:txBody>
       </p:sp>
       <p:sp>
         <p:nvSpPr>
@@ -15289,6 +16088,13 @@
             <a:prstDash val="solid"/>
           </a:ln>
         </p:spPr>
+        <p:txBody>
+          <a:bodyPr/>
+          <a:lstStyle/>
+          <a:p>
+            <a:endParaRPr lang="en-BE"/>
+          </a:p>
+        </p:txBody>
       </p:sp>
       <p:sp>
         <p:nvSpPr>
@@ -15311,7 +16117,7 @@
           <a:bodyPr wrap="square" lIns="0" tIns="0" rIns="0" bIns="0" rtlCol="0" anchor="ctr"/>
           <a:lstStyle/>
           <a:p>
-            <a:pPr algn="ctr" indent="0" marL="0">
+            <a:pPr marL="0" indent="0" algn="ctr">
               <a:buNone/>
             </a:pPr>
             <a:r>
@@ -15350,7 +16156,7 @@
           <a:bodyPr wrap="square" lIns="0" tIns="0" rIns="0" bIns="0" rtlCol="0" anchor="ctr"/>
           <a:lstStyle/>
           <a:p>
-            <a:pPr indent="0" marL="0">
+            <a:pPr marL="0" indent="0">
               <a:buNone/>
             </a:pPr>
             <a:r>
@@ -15389,7 +16195,7 @@
           <a:bodyPr wrap="square" lIns="0" tIns="0" rIns="0" bIns="0" rtlCol="0" anchor="ctr"/>
           <a:lstStyle/>
           <a:p>
-            <a:pPr indent="0" marL="0">
+            <a:pPr marL="0" indent="0">
               <a:buNone/>
             </a:pPr>
             <a:r>
@@ -15423,6 +16229,7 @@
         <a:solidFill>
           <a:srgbClr val="FAF5EC"/>
         </a:solidFill>
+        <a:effectLst/>
       </p:bgPr>
     </p:bg>
     <p:spTree>
@@ -15463,6 +16270,13 @@
             <a:prstDash val="solid"/>
           </a:ln>
         </p:spPr>
+        <p:txBody>
+          <a:bodyPr/>
+          <a:lstStyle/>
+          <a:p>
+            <a:endParaRPr lang="en-BE"/>
+          </a:p>
+        </p:txBody>
       </p:sp>
       <p:sp>
         <p:nvSpPr>
@@ -15485,7 +16299,7 @@
           <a:bodyPr wrap="square" lIns="0" tIns="0" rIns="0" bIns="0" rtlCol="0" anchor="ctr"/>
           <a:lstStyle/>
           <a:p>
-            <a:pPr indent="0" marL="0">
+            <a:pPr marL="0" indent="0">
               <a:buNone/>
             </a:pPr>
             <a:r>
@@ -15524,7 +16338,7 @@
           <a:bodyPr wrap="square" lIns="0" tIns="0" rIns="0" bIns="0" rtlCol="0" anchor="ctr"/>
           <a:lstStyle/>
           <a:p>
-            <a:pPr indent="0" marL="0">
+            <a:pPr marL="0" indent="0">
               <a:buNone/>
             </a:pPr>
             <a:r>
@@ -15563,7 +16377,7 @@
           <a:bodyPr wrap="square" lIns="0" tIns="0" rIns="0" bIns="0" rtlCol="0" anchor="ctr"/>
           <a:lstStyle/>
           <a:p>
-            <a:pPr indent="0" marL="0">
+            <a:pPr marL="0" indent="0">
               <a:buNone/>
             </a:pPr>
             <a:r>
@@ -15602,7 +16416,7 @@
           <a:bodyPr wrap="square" lIns="0" tIns="0" rIns="0" bIns="0" rtlCol="0" anchor="ctr"/>
           <a:lstStyle/>
           <a:p>
-            <a:pPr indent="0" marL="0">
+            <a:pPr marL="0" indent="0">
               <a:buNone/>
             </a:pPr>
             <a:r>
@@ -15644,6 +16458,13 @@
             <a:prstDash val="solid"/>
           </a:ln>
         </p:spPr>
+        <p:txBody>
+          <a:bodyPr/>
+          <a:lstStyle/>
+          <a:p>
+            <a:endParaRPr lang="en-BE"/>
+          </a:p>
+        </p:txBody>
       </p:sp>
       <p:sp>
         <p:nvSpPr>
@@ -15669,6 +16490,13 @@
             <a:prstDash val="solid"/>
           </a:ln>
         </p:spPr>
+        <p:txBody>
+          <a:bodyPr/>
+          <a:lstStyle/>
+          <a:p>
+            <a:endParaRPr lang="en-BE"/>
+          </a:p>
+        </p:txBody>
       </p:sp>
       <p:sp>
         <p:nvSpPr>
@@ -15691,7 +16519,7 @@
           <a:bodyPr wrap="square" lIns="0" tIns="0" rIns="0" bIns="0" rtlCol="0" anchor="ctr"/>
           <a:lstStyle/>
           <a:p>
-            <a:pPr indent="0" marL="0">
+            <a:pPr marL="0" indent="0">
               <a:buNone/>
             </a:pPr>
             <a:r>
@@ -15730,7 +16558,7 @@
           <a:bodyPr wrap="square" lIns="0" tIns="0" rIns="0" bIns="0" rtlCol="0" anchor="ctr"/>
           <a:lstStyle/>
           <a:p>
-            <a:pPr indent="0" marL="0">
+            <a:pPr marL="0" indent="0">
               <a:buNone/>
             </a:pPr>
             <a:r>
@@ -15772,6 +16600,13 @@
             <a:prstDash val="solid"/>
           </a:ln>
         </p:spPr>
+        <p:txBody>
+          <a:bodyPr/>
+          <a:lstStyle/>
+          <a:p>
+            <a:endParaRPr lang="en-BE"/>
+          </a:p>
+        </p:txBody>
       </p:sp>
       <p:sp>
         <p:nvSpPr>
@@ -15797,6 +16632,13 @@
             <a:prstDash val="solid"/>
           </a:ln>
         </p:spPr>
+        <p:txBody>
+          <a:bodyPr/>
+          <a:lstStyle/>
+          <a:p>
+            <a:endParaRPr lang="en-BE"/>
+          </a:p>
+        </p:txBody>
       </p:sp>
       <p:sp>
         <p:nvSpPr>
@@ -15819,7 +16661,7 @@
           <a:bodyPr wrap="square" lIns="0" tIns="0" rIns="0" bIns="0" rtlCol="0" anchor="ctr"/>
           <a:lstStyle/>
           <a:p>
-            <a:pPr indent="0" marL="0">
+            <a:pPr marL="0" indent="0">
               <a:buNone/>
             </a:pPr>
             <a:r>
@@ -15858,7 +16700,7 @@
           <a:bodyPr wrap="square" lIns="0" tIns="0" rIns="0" bIns="0" rtlCol="0" anchor="ctr"/>
           <a:lstStyle/>
           <a:p>
-            <a:pPr indent="0" marL="0">
+            <a:pPr marL="0" indent="0">
               <a:buNone/>
             </a:pPr>
             <a:r>
@@ -15900,6 +16742,13 @@
             <a:prstDash val="solid"/>
           </a:ln>
         </p:spPr>
+        <p:txBody>
+          <a:bodyPr/>
+          <a:lstStyle/>
+          <a:p>
+            <a:endParaRPr lang="en-BE"/>
+          </a:p>
+        </p:txBody>
       </p:sp>
       <p:sp>
         <p:nvSpPr>
@@ -15925,6 +16774,13 @@
             <a:prstDash val="solid"/>
           </a:ln>
         </p:spPr>
+        <p:txBody>
+          <a:bodyPr/>
+          <a:lstStyle/>
+          <a:p>
+            <a:endParaRPr lang="en-BE"/>
+          </a:p>
+        </p:txBody>
       </p:sp>
       <p:sp>
         <p:nvSpPr>
@@ -15947,7 +16803,7 @@
           <a:bodyPr wrap="square" lIns="0" tIns="0" rIns="0" bIns="0" rtlCol="0" anchor="ctr"/>
           <a:lstStyle/>
           <a:p>
-            <a:pPr indent="0" marL="0">
+            <a:pPr marL="0" indent="0">
               <a:buNone/>
             </a:pPr>
             <a:r>
@@ -15986,7 +16842,7 @@
           <a:bodyPr wrap="square" lIns="0" tIns="0" rIns="0" bIns="0" rtlCol="0" anchor="ctr"/>
           <a:lstStyle/>
           <a:p>
-            <a:pPr indent="0" marL="0">
+            <a:pPr marL="0" indent="0">
               <a:buNone/>
             </a:pPr>
             <a:r>
@@ -16025,7 +16881,7 @@
           <a:bodyPr wrap="square" lIns="0" tIns="0" rIns="0" bIns="0" rtlCol="0" anchor="ctr"/>
           <a:lstStyle/>
           <a:p>
-            <a:pPr indent="0" marL="0">
+            <a:pPr marL="0" indent="0">
               <a:buNone/>
             </a:pPr>
             <a:r>
@@ -16191,7 +17047,7 @@
           <a:bodyPr wrap="square" lIns="0" tIns="0" rIns="0" bIns="0" rtlCol="0" anchor="ctr"/>
           <a:lstStyle/>
           <a:p>
-            <a:pPr indent="0" marL="0">
+            <a:pPr marL="0" indent="0">
               <a:buNone/>
             </a:pPr>
             <a:r>
@@ -16233,6 +17089,13 @@
             <a:prstDash val="solid"/>
           </a:ln>
         </p:spPr>
+        <p:txBody>
+          <a:bodyPr/>
+          <a:lstStyle/>
+          <a:p>
+            <a:endParaRPr lang="en-BE"/>
+          </a:p>
+        </p:txBody>
       </p:sp>
       <p:sp>
         <p:nvSpPr>
@@ -16258,6 +17121,13 @@
             <a:prstDash val="solid"/>
           </a:ln>
         </p:spPr>
+        <p:txBody>
+          <a:bodyPr/>
+          <a:lstStyle/>
+          <a:p>
+            <a:endParaRPr lang="en-BE"/>
+          </a:p>
+        </p:txBody>
       </p:sp>
       <p:sp>
         <p:nvSpPr>
@@ -16280,7 +17150,7 @@
           <a:bodyPr wrap="square" lIns="0" tIns="0" rIns="0" bIns="0" rtlCol="0" anchor="ctr"/>
           <a:lstStyle/>
           <a:p>
-            <a:pPr indent="0" marL="0">
+            <a:pPr marL="0" indent="0">
               <a:buNone/>
             </a:pPr>
             <a:r>
@@ -16319,7 +17189,7 @@
           <a:bodyPr wrap="square" lIns="0" tIns="0" rIns="0" bIns="0" rtlCol="0" anchor="ctr"/>
           <a:lstStyle/>
           <a:p>
-            <a:pPr indent="0" marL="0">
+            <a:pPr marL="0" indent="0">
               <a:buNone/>
             </a:pPr>
             <a:r>
@@ -16358,7 +17228,7 @@
           <a:bodyPr wrap="square" lIns="0" tIns="0" rIns="0" bIns="0" rtlCol="0" anchor="ctr"/>
           <a:lstStyle/>
           <a:p>
-            <a:pPr indent="0" marL="0">
+            <a:pPr marL="0" indent="0">
               <a:buNone/>
             </a:pPr>
             <a:r>
@@ -16397,7 +17267,7 @@
           <a:bodyPr wrap="square" lIns="0" tIns="0" rIns="0" bIns="0" rtlCol="0" anchor="ctr"/>
           <a:lstStyle/>
           <a:p>
-            <a:pPr indent="0" marL="0">
+            <a:pPr marL="0" indent="0">
               <a:buNone/>
             </a:pPr>
             <a:r>
@@ -16436,7 +17306,7 @@
           <a:bodyPr wrap="square" lIns="0" tIns="0" rIns="0" bIns="0" rtlCol="0" anchor="ctr"/>
           <a:lstStyle/>
           <a:p>
-            <a:pPr indent="0" marL="0">
+            <a:pPr marL="0" indent="0">
               <a:buNone/>
             </a:pPr>
             <a:r>
@@ -16475,7 +17345,7 @@
           <a:bodyPr wrap="square" lIns="0" tIns="0" rIns="0" bIns="0" rtlCol="0" anchor="ctr"/>
           <a:lstStyle/>
           <a:p>
-            <a:pPr indent="0" marL="0">
+            <a:pPr marL="0" indent="0">
               <a:buNone/>
             </a:pPr>
             <a:r>
@@ -16514,7 +17384,7 @@
           <a:bodyPr wrap="square" lIns="0" tIns="0" rIns="0" bIns="0" rtlCol="0" anchor="ctr"/>
           <a:lstStyle/>
           <a:p>
-            <a:pPr indent="0" marL="0">
+            <a:pPr marL="0" indent="0">
               <a:buNone/>
             </a:pPr>
             <a:r>
@@ -16553,7 +17423,7 @@
           <a:bodyPr wrap="square" lIns="0" tIns="0" rIns="0" bIns="0" rtlCol="0" anchor="ctr"/>
           <a:lstStyle/>
           <a:p>
-            <a:pPr indent="0" marL="0">
+            <a:pPr marL="0" indent="0">
               <a:buNone/>
             </a:pPr>
             <a:r>
@@ -16592,7 +17462,7 @@
           <a:bodyPr wrap="square" lIns="0" tIns="0" rIns="0" bIns="0" rtlCol="0" anchor="ctr"/>
           <a:lstStyle/>
           <a:p>
-            <a:pPr indent="0" marL="0">
+            <a:pPr marL="0" indent="0">
               <a:buNone/>
             </a:pPr>
             <a:r>
@@ -16631,7 +17501,7 @@
           <a:bodyPr wrap="square" lIns="0" tIns="0" rIns="0" bIns="0" rtlCol="0" anchor="ctr"/>
           <a:lstStyle/>
           <a:p>
-            <a:pPr indent="0" marL="0">
+            <a:pPr marL="0" indent="0">
               <a:buNone/>
             </a:pPr>
             <a:r>
@@ -16670,7 +17540,7 @@
           <a:bodyPr wrap="square" lIns="0" tIns="0" rIns="0" bIns="0" rtlCol="0" anchor="ctr"/>
           <a:lstStyle/>
           <a:p>
-            <a:pPr indent="0" marL="0">
+            <a:pPr marL="0" indent="0">
               <a:buNone/>
             </a:pPr>
             <a:r>
@@ -16709,7 +17579,7 @@
           <a:bodyPr wrap="square" lIns="0" tIns="0" rIns="0" bIns="0" rtlCol="0" anchor="ctr"/>
           <a:lstStyle/>
           <a:p>
-            <a:pPr indent="0" marL="0">
+            <a:pPr marL="0" indent="0">
               <a:buNone/>
             </a:pPr>
             <a:r>
@@ -16743,6 +17613,7 @@
         <a:solidFill>
           <a:srgbClr val="1A1208"/>
         </a:solidFill>
+        <a:effectLst/>
       </p:bgPr>
     </p:bg>
     <p:spTree>
@@ -16785,6 +17656,13 @@
             <a:prstDash val="solid"/>
           </a:ln>
         </p:spPr>
+        <p:txBody>
+          <a:bodyPr/>
+          <a:lstStyle/>
+          <a:p>
+            <a:endParaRPr lang="en-BE"/>
+          </a:p>
+        </p:txBody>
       </p:sp>
       <p:sp>
         <p:nvSpPr>
@@ -16810,6 +17688,13 @@
             <a:prstDash val="solid"/>
           </a:ln>
         </p:spPr>
+        <p:txBody>
+          <a:bodyPr/>
+          <a:lstStyle/>
+          <a:p>
+            <a:endParaRPr lang="en-BE"/>
+          </a:p>
+        </p:txBody>
       </p:sp>
       <p:sp>
         <p:nvSpPr>
@@ -16832,11 +17717,11 @@
           <a:bodyPr wrap="square" lIns="0" tIns="0" rIns="0" bIns="0" rtlCol="0" anchor="ctr"/>
           <a:lstStyle/>
           <a:p>
-            <a:pPr indent="0" marL="0">
-              <a:buNone/>
-            </a:pPr>
-            <a:r>
-              <a:rPr lang="en-US" sz="1300" spc="400" kern="0" dirty="0">
+            <a:pPr marL="0" indent="0">
+              <a:buNone/>
+            </a:pPr>
+            <a:r>
+              <a:rPr lang="en-US" sz="1300" kern="0" spc="400" dirty="0">
                 <a:solidFill>
                   <a:srgbClr val="F5AC32"/>
                 </a:solidFill>
@@ -16871,7 +17756,7 @@
           <a:bodyPr wrap="square" lIns="0" tIns="0" rIns="0" bIns="0" rtlCol="0" anchor="ctr"/>
           <a:lstStyle/>
           <a:p>
-            <a:pPr indent="0" marL="0">
+            <a:pPr marL="0" indent="0">
               <a:buNone/>
             </a:pPr>
             <a:r>
@@ -16910,7 +17795,7 @@
           <a:bodyPr wrap="square" lIns="0" tIns="0" rIns="0" bIns="0" rtlCol="0" anchor="ctr"/>
           <a:lstStyle/>
           <a:p>
-            <a:pPr indent="0" marL="0">
+            <a:pPr marL="0" indent="0">
               <a:buNone/>
             </a:pPr>
             <a:r>
@@ -16949,7 +17834,7 @@
           <a:bodyPr wrap="square" lIns="0" tIns="0" rIns="0" bIns="0" rtlCol="0" anchor="ctr"/>
           <a:lstStyle/>
           <a:p>
-            <a:pPr indent="0" marL="0">
+            <a:pPr marL="0" indent="0">
               <a:buNone/>
             </a:pPr>
             <a:r>
@@ -16983,6 +17868,7 @@
         <a:solidFill>
           <a:srgbClr val="FAF5EC"/>
         </a:solidFill>
+        <a:effectLst/>
       </p:bgPr>
     </p:bg>
     <p:spTree>
@@ -17023,6 +17909,13 @@
             <a:prstDash val="solid"/>
           </a:ln>
         </p:spPr>
+        <p:txBody>
+          <a:bodyPr/>
+          <a:lstStyle/>
+          <a:p>
+            <a:endParaRPr lang="en-BE"/>
+          </a:p>
+        </p:txBody>
       </p:sp>
       <p:sp>
         <p:nvSpPr>
@@ -17045,7 +17938,7 @@
           <a:bodyPr wrap="square" lIns="0" tIns="0" rIns="0" bIns="0" rtlCol="0" anchor="ctr"/>
           <a:lstStyle/>
           <a:p>
-            <a:pPr indent="0" marL="0">
+            <a:pPr marL="0" indent="0">
               <a:buNone/>
             </a:pPr>
             <a:r>
@@ -17084,7 +17977,7 @@
           <a:bodyPr wrap="square" lIns="0" tIns="0" rIns="0" bIns="0" rtlCol="0" anchor="ctr"/>
           <a:lstStyle/>
           <a:p>
-            <a:pPr indent="0" marL="0">
+            <a:pPr marL="0" indent="0">
               <a:buNone/>
             </a:pPr>
             <a:r>
@@ -17123,7 +18016,7 @@
           <a:bodyPr wrap="square" lIns="0" tIns="0" rIns="0" bIns="0" rtlCol="0" anchor="ctr"/>
           <a:lstStyle/>
           <a:p>
-            <a:pPr indent="0" marL="0">
+            <a:pPr marL="0" indent="0">
               <a:buNone/>
             </a:pPr>
             <a:r>
@@ -17165,6 +18058,13 @@
             <a:prstDash val="solid"/>
           </a:ln>
         </p:spPr>
+        <p:txBody>
+          <a:bodyPr/>
+          <a:lstStyle/>
+          <a:p>
+            <a:endParaRPr lang="en-BE"/>
+          </a:p>
+        </p:txBody>
       </p:sp>
       <p:sp>
         <p:nvSpPr>
@@ -17190,6 +18090,13 @@
             <a:prstDash val="solid"/>
           </a:ln>
         </p:spPr>
+        <p:txBody>
+          <a:bodyPr/>
+          <a:lstStyle/>
+          <a:p>
+            <a:endParaRPr lang="en-BE"/>
+          </a:p>
+        </p:txBody>
       </p:sp>
       <p:sp>
         <p:nvSpPr>
@@ -17212,7 +18119,7 @@
           <a:bodyPr wrap="square" lIns="0" tIns="0" rIns="0" bIns="0" rtlCol="0" anchor="ctr"/>
           <a:lstStyle/>
           <a:p>
-            <a:pPr algn="ctr" indent="0" marL="0">
+            <a:pPr marL="0" indent="0" algn="ctr">
               <a:buNone/>
             </a:pPr>
             <a:r>
@@ -17360,6 +18267,13 @@
             <a:prstDash val="solid"/>
           </a:ln>
         </p:spPr>
+        <p:txBody>
+          <a:bodyPr/>
+          <a:lstStyle/>
+          <a:p>
+            <a:endParaRPr lang="en-BE"/>
+          </a:p>
+        </p:txBody>
       </p:sp>
       <p:sp>
         <p:nvSpPr>
@@ -17385,6 +18299,13 @@
             <a:prstDash val="solid"/>
           </a:ln>
         </p:spPr>
+        <p:txBody>
+          <a:bodyPr/>
+          <a:lstStyle/>
+          <a:p>
+            <a:endParaRPr lang="en-BE"/>
+          </a:p>
+        </p:txBody>
       </p:sp>
       <p:sp>
         <p:nvSpPr>
@@ -17407,7 +18328,7 @@
           <a:bodyPr wrap="square" lIns="0" tIns="0" rIns="0" bIns="0" rtlCol="0" anchor="ctr"/>
           <a:lstStyle/>
           <a:p>
-            <a:pPr algn="ctr" indent="0" marL="0">
+            <a:pPr marL="0" indent="0" algn="ctr">
               <a:buNone/>
             </a:pPr>
             <a:r>
@@ -17555,6 +18476,13 @@
             <a:prstDash val="solid"/>
           </a:ln>
         </p:spPr>
+        <p:txBody>
+          <a:bodyPr/>
+          <a:lstStyle/>
+          <a:p>
+            <a:endParaRPr lang="en-BE"/>
+          </a:p>
+        </p:txBody>
       </p:sp>
       <p:sp>
         <p:nvSpPr>
@@ -17580,6 +18508,13 @@
             <a:prstDash val="solid"/>
           </a:ln>
         </p:spPr>
+        <p:txBody>
+          <a:bodyPr/>
+          <a:lstStyle/>
+          <a:p>
+            <a:endParaRPr lang="en-BE"/>
+          </a:p>
+        </p:txBody>
       </p:sp>
       <p:sp>
         <p:nvSpPr>
@@ -17602,7 +18537,7 @@
           <a:bodyPr wrap="square" lIns="0" tIns="0" rIns="0" bIns="0" rtlCol="0" anchor="ctr"/>
           <a:lstStyle/>
           <a:p>
-            <a:pPr algn="ctr" indent="0" marL="0">
+            <a:pPr marL="0" indent="0" algn="ctr">
               <a:buNone/>
             </a:pPr>
             <a:r>
@@ -17747,7 +18682,7 @@
           <a:bodyPr wrap="square" lIns="0" tIns="0" rIns="0" bIns="0" rtlCol="0" anchor="ctr"/>
           <a:lstStyle/>
           <a:p>
-            <a:pPr indent="0" marL="0">
+            <a:pPr marL="0" indent="0">
               <a:buNone/>
             </a:pPr>
             <a:r>
@@ -17789,6 +18724,13 @@
             <a:prstDash val="solid"/>
           </a:ln>
         </p:spPr>
+        <p:txBody>
+          <a:bodyPr/>
+          <a:lstStyle/>
+          <a:p>
+            <a:endParaRPr lang="en-BE"/>
+          </a:p>
+        </p:txBody>
       </p:sp>
       <p:sp>
         <p:nvSpPr>
@@ -17811,7 +18753,7 @@
           <a:bodyPr wrap="square" lIns="0" tIns="0" rIns="0" bIns="0" rtlCol="0" anchor="ctr"/>
           <a:lstStyle/>
           <a:p>
-            <a:pPr algn="ctr" indent="0" marL="0">
+            <a:pPr marL="0" indent="0" algn="ctr">
               <a:buNone/>
             </a:pPr>
             <a:r>
@@ -17853,6 +18795,13 @@
             <a:prstDash val="solid"/>
           </a:ln>
         </p:spPr>
+        <p:txBody>
+          <a:bodyPr/>
+          <a:lstStyle/>
+          <a:p>
+            <a:endParaRPr lang="en-BE"/>
+          </a:p>
+        </p:txBody>
       </p:sp>
       <p:sp>
         <p:nvSpPr>
@@ -17878,6 +18827,13 @@
             <a:prstDash val="solid"/>
           </a:ln>
         </p:spPr>
+        <p:txBody>
+          <a:bodyPr/>
+          <a:lstStyle/>
+          <a:p>
+            <a:endParaRPr lang="en-BE"/>
+          </a:p>
+        </p:txBody>
       </p:sp>
       <p:sp>
         <p:nvSpPr>
@@ -17900,7 +18856,7 @@
           <a:bodyPr wrap="square" lIns="0" tIns="0" rIns="0" bIns="0" rtlCol="0" anchor="ctr"/>
           <a:lstStyle/>
           <a:p>
-            <a:pPr algn="ctr" indent="0" marL="0">
+            <a:pPr marL="0" indent="0" algn="ctr">
               <a:buNone/>
             </a:pPr>
             <a:r>
@@ -17942,6 +18898,13 @@
             <a:prstDash val="solid"/>
           </a:ln>
         </p:spPr>
+        <p:txBody>
+          <a:bodyPr/>
+          <a:lstStyle/>
+          <a:p>
+            <a:endParaRPr lang="en-BE"/>
+          </a:p>
+        </p:txBody>
       </p:sp>
       <p:sp>
         <p:nvSpPr>
@@ -17967,6 +18930,13 @@
             <a:prstDash val="solid"/>
           </a:ln>
         </p:spPr>
+        <p:txBody>
+          <a:bodyPr/>
+          <a:lstStyle/>
+          <a:p>
+            <a:endParaRPr lang="en-BE"/>
+          </a:p>
+        </p:txBody>
       </p:sp>
       <p:sp>
         <p:nvSpPr>
@@ -17989,7 +18959,7 @@
           <a:bodyPr wrap="square" lIns="0" tIns="0" rIns="0" bIns="0" rtlCol="0" anchor="ctr"/>
           <a:lstStyle/>
           <a:p>
-            <a:pPr algn="ctr" indent="0" marL="0">
+            <a:pPr marL="0" indent="0" algn="ctr">
               <a:buNone/>
             </a:pPr>
             <a:r>
@@ -18031,6 +19001,13 @@
             <a:prstDash val="solid"/>
           </a:ln>
         </p:spPr>
+        <p:txBody>
+          <a:bodyPr/>
+          <a:lstStyle/>
+          <a:p>
+            <a:endParaRPr lang="en-BE"/>
+          </a:p>
+        </p:txBody>
       </p:sp>
       <p:sp>
         <p:nvSpPr>
@@ -18056,6 +19033,13 @@
             <a:prstDash val="solid"/>
           </a:ln>
         </p:spPr>
+        <p:txBody>
+          <a:bodyPr/>
+          <a:lstStyle/>
+          <a:p>
+            <a:endParaRPr lang="en-BE"/>
+          </a:p>
+        </p:txBody>
       </p:sp>
       <p:sp>
         <p:nvSpPr>
@@ -18078,7 +19062,7 @@
           <a:bodyPr wrap="square" lIns="0" tIns="0" rIns="0" bIns="0" rtlCol="0" anchor="ctr"/>
           <a:lstStyle/>
           <a:p>
-            <a:pPr algn="ctr" indent="0" marL="0">
+            <a:pPr marL="0" indent="0" algn="ctr">
               <a:buNone/>
             </a:pPr>
             <a:r>
@@ -18120,6 +19104,13 @@
             <a:prstDash val="solid"/>
           </a:ln>
         </p:spPr>
+        <p:txBody>
+          <a:bodyPr/>
+          <a:lstStyle/>
+          <a:p>
+            <a:endParaRPr lang="en-BE"/>
+          </a:p>
+        </p:txBody>
       </p:sp>
       <p:sp>
         <p:nvSpPr>
@@ -18145,6 +19136,13 @@
             <a:prstDash val="solid"/>
           </a:ln>
         </p:spPr>
+        <p:txBody>
+          <a:bodyPr/>
+          <a:lstStyle/>
+          <a:p>
+            <a:endParaRPr lang="en-BE"/>
+          </a:p>
+        </p:txBody>
       </p:sp>
       <p:sp>
         <p:nvSpPr>
@@ -18167,7 +19165,7 @@
           <a:bodyPr wrap="square" lIns="0" tIns="0" rIns="0" bIns="0" rtlCol="0" anchor="ctr"/>
           <a:lstStyle/>
           <a:p>
-            <a:pPr algn="ctr" indent="0" marL="0">
+            <a:pPr marL="0" indent="0" algn="ctr">
               <a:buNone/>
             </a:pPr>
             <a:r>
@@ -18209,6 +19207,13 @@
             <a:prstDash val="solid"/>
           </a:ln>
         </p:spPr>
+        <p:txBody>
+          <a:bodyPr/>
+          <a:lstStyle/>
+          <a:p>
+            <a:endParaRPr lang="en-BE"/>
+          </a:p>
+        </p:txBody>
       </p:sp>
       <p:sp>
         <p:nvSpPr>
@@ -18234,6 +19239,13 @@
             <a:prstDash val="solid"/>
           </a:ln>
         </p:spPr>
+        <p:txBody>
+          <a:bodyPr/>
+          <a:lstStyle/>
+          <a:p>
+            <a:endParaRPr lang="en-BE"/>
+          </a:p>
+        </p:txBody>
       </p:sp>
       <p:sp>
         <p:nvSpPr>
@@ -18256,7 +19268,7 @@
           <a:bodyPr wrap="square" lIns="0" tIns="0" rIns="0" bIns="0" rtlCol="0" anchor="ctr"/>
           <a:lstStyle/>
           <a:p>
-            <a:pPr algn="ctr" indent="0" marL="0">
+            <a:pPr marL="0" indent="0" algn="ctr">
               <a:buNone/>
             </a:pPr>
             <a:r>
@@ -18575,4 +19587,319 @@
     </a:ext>
   </a:extLst>
 </a:theme>
+</file>
+
+<file path=ppt/theme/theme2.xml><?xml version="1.0" encoding="utf-8"?>
+<a:theme xmlns:a="http://schemas.openxmlformats.org/drawingml/2006/main" name="Office Theme">
+  <a:themeElements>
+    <a:clrScheme name="Office">
+      <a:dk1>
+        <a:sysClr val="windowText" lastClr="000000"/>
+      </a:dk1>
+      <a:lt1>
+        <a:sysClr val="window" lastClr="FFFFFF"/>
+      </a:lt1>
+      <a:dk2>
+        <a:srgbClr val="0E2841"/>
+      </a:dk2>
+      <a:lt2>
+        <a:srgbClr val="E8E8E8"/>
+      </a:lt2>
+      <a:accent1>
+        <a:srgbClr val="156082"/>
+      </a:accent1>
+      <a:accent2>
+        <a:srgbClr val="E97132"/>
+      </a:accent2>
+      <a:accent3>
+        <a:srgbClr val="196B24"/>
+      </a:accent3>
+      <a:accent4>
+        <a:srgbClr val="0F9ED5"/>
+      </a:accent4>
+      <a:accent5>
+        <a:srgbClr val="A02B93"/>
+      </a:accent5>
+      <a:accent6>
+        <a:srgbClr val="4EA72E"/>
+      </a:accent6>
+      <a:hlink>
+        <a:srgbClr val="467886"/>
+      </a:hlink>
+      <a:folHlink>
+        <a:srgbClr val="96607D"/>
+      </a:folHlink>
+    </a:clrScheme>
+    <a:fontScheme name="Office">
+      <a:majorFont>
+        <a:latin typeface="Aptos Display" panose="02110004020202020204"/>
+        <a:ea typeface=""/>
+        <a:cs typeface=""/>
+        <a:font script="Jpan" typeface="游ゴシック Light"/>
+        <a:font script="Hang" typeface="맑은 고딕"/>
+        <a:font script="Hans" typeface="等线 Light"/>
+        <a:font script="Hant" typeface="新細明體"/>
+        <a:font script="Arab" typeface="Times New Roman"/>
+        <a:font script="Hebr" typeface="Times New Roman"/>
+        <a:font script="Thai" typeface="Angsana New"/>
+        <a:font script="Ethi" typeface="Nyala"/>
+        <a:font script="Beng" typeface="Vrinda"/>
+        <a:font script="Gujr" typeface="Shruti"/>
+        <a:font script="Khmr" typeface="MoolBoran"/>
+        <a:font script="Knda" typeface="Tunga"/>
+        <a:font script="Guru" typeface="Raavi"/>
+        <a:font script="Cans" typeface="Euphemia"/>
+        <a:font script="Cher" typeface="Plantagenet Cherokee"/>
+        <a:font script="Yiii" typeface="Microsoft Yi Baiti"/>
+        <a:font script="Tibt" typeface="Microsoft Himalaya"/>
+        <a:font script="Thaa" typeface="MV Boli"/>
+        <a:font script="Deva" typeface="Mangal"/>
+        <a:font script="Telu" typeface="Gautami"/>
+        <a:font script="Taml" typeface="Latha"/>
+        <a:font script="Syrc" typeface="Estrangelo Edessa"/>
+        <a:font script="Orya" typeface="Kalinga"/>
+        <a:font script="Mlym" typeface="Kartika"/>
+        <a:font script="Laoo" typeface="DokChampa"/>
+        <a:font script="Sinh" typeface="Iskoola Pota"/>
+        <a:font script="Mong" typeface="Mongolian Baiti"/>
+        <a:font script="Viet" typeface="Times New Roman"/>
+        <a:font script="Uigh" typeface="Microsoft Uighur"/>
+        <a:font script="Geor" typeface="Sylfaen"/>
+        <a:font script="Armn" typeface="Arial"/>
+        <a:font script="Bugi" typeface="Leelawadee UI"/>
+        <a:font script="Bopo" typeface="Microsoft JhengHei"/>
+        <a:font script="Java" typeface="Javanese Text"/>
+        <a:font script="Lisu" typeface="Segoe UI"/>
+        <a:font script="Mymr" typeface="Myanmar Text"/>
+        <a:font script="Nkoo" typeface="Ebrima"/>
+        <a:font script="Olck" typeface="Nirmala UI"/>
+        <a:font script="Osma" typeface="Ebrima"/>
+        <a:font script="Phag" typeface="Phagspa"/>
+        <a:font script="Syrn" typeface="Estrangelo Edessa"/>
+        <a:font script="Syrj" typeface="Estrangelo Edessa"/>
+        <a:font script="Syre" typeface="Estrangelo Edessa"/>
+        <a:font script="Sora" typeface="Nirmala UI"/>
+        <a:font script="Tale" typeface="Microsoft Tai Le"/>
+        <a:font script="Talu" typeface="Microsoft New Tai Lue"/>
+        <a:font script="Tfng" typeface="Ebrima"/>
+      </a:majorFont>
+      <a:minorFont>
+        <a:latin typeface="Aptos" panose="02110004020202020204"/>
+        <a:ea typeface=""/>
+        <a:cs typeface=""/>
+        <a:font script="Jpan" typeface="游ゴシック"/>
+        <a:font script="Hang" typeface="맑은 고딕"/>
+        <a:font script="Hans" typeface="等线"/>
+        <a:font script="Hant" typeface="新細明體"/>
+        <a:font script="Arab" typeface="Arial"/>
+        <a:font script="Hebr" typeface="Arial"/>
+        <a:font script="Thai" typeface="Cordia New"/>
+        <a:font script="Ethi" typeface="Nyala"/>
+        <a:font script="Beng" typeface="Vrinda"/>
+        <a:font script="Gujr" typeface="Shruti"/>
+        <a:font script="Khmr" typeface="DaunPenh"/>
+        <a:font script="Knda" typeface="Tunga"/>
+        <a:font script="Guru" typeface="Raavi"/>
+        <a:font script="Cans" typeface="Euphemia"/>
+        <a:font script="Cher" typeface="Plantagenet Cherokee"/>
+        <a:font script="Yiii" typeface="Microsoft Yi Baiti"/>
+        <a:font script="Tibt" typeface="Microsoft Himalaya"/>
+        <a:font script="Thaa" typeface="MV Boli"/>
+        <a:font script="Deva" typeface="Mangal"/>
+        <a:font script="Telu" typeface="Gautami"/>
+        <a:font script="Taml" typeface="Latha"/>
+        <a:font script="Syrc" typeface="Estrangelo Edessa"/>
+        <a:font script="Orya" typeface="Kalinga"/>
+        <a:font script="Mlym" typeface="Kartika"/>
+        <a:font script="Laoo" typeface="DokChampa"/>
+        <a:font script="Sinh" typeface="Iskoola Pota"/>
+        <a:font script="Mong" typeface="Mongolian Baiti"/>
+        <a:font script="Viet" typeface="Arial"/>
+        <a:font script="Uigh" typeface="Microsoft Uighur"/>
+        <a:font script="Geor" typeface="Sylfaen"/>
+        <a:font script="Armn" typeface="Arial"/>
+        <a:font script="Bugi" typeface="Leelawadee UI"/>
+        <a:font script="Bopo" typeface="Microsoft JhengHei"/>
+        <a:font script="Java" typeface="Javanese Text"/>
+        <a:font script="Lisu" typeface="Segoe UI"/>
+        <a:font script="Mymr" typeface="Myanmar Text"/>
+        <a:font script="Nkoo" typeface="Ebrima"/>
+        <a:font script="Olck" typeface="Nirmala UI"/>
+        <a:font script="Osma" typeface="Ebrima"/>
+        <a:font script="Phag" typeface="Phagspa"/>
+        <a:font script="Syrn" typeface="Estrangelo Edessa"/>
+        <a:font script="Syrj" typeface="Estrangelo Edessa"/>
+        <a:font script="Syre" typeface="Estrangelo Edessa"/>
+        <a:font script="Sora" typeface="Nirmala UI"/>
+        <a:font script="Tale" typeface="Microsoft Tai Le"/>
+        <a:font script="Talu" typeface="Microsoft New Tai Lue"/>
+        <a:font script="Tfng" typeface="Ebrima"/>
+      </a:minorFont>
+    </a:fontScheme>
+    <a:fmtScheme name="Office">
+      <a:fillStyleLst>
+        <a:solidFill>
+          <a:schemeClr val="phClr"/>
+        </a:solidFill>
+        <a:gradFill rotWithShape="1">
+          <a:gsLst>
+            <a:gs pos="0">
+              <a:schemeClr val="phClr">
+                <a:lumMod val="110000"/>
+                <a:satMod val="105000"/>
+                <a:tint val="67000"/>
+              </a:schemeClr>
+            </a:gs>
+            <a:gs pos="50000">
+              <a:schemeClr val="phClr">
+                <a:lumMod val="105000"/>
+                <a:satMod val="103000"/>
+                <a:tint val="73000"/>
+              </a:schemeClr>
+            </a:gs>
+            <a:gs pos="100000">
+              <a:schemeClr val="phClr">
+                <a:lumMod val="105000"/>
+                <a:satMod val="109000"/>
+                <a:tint val="81000"/>
+              </a:schemeClr>
+            </a:gs>
+          </a:gsLst>
+          <a:lin ang="5400000" scaled="0"/>
+        </a:gradFill>
+        <a:gradFill rotWithShape="1">
+          <a:gsLst>
+            <a:gs pos="0">
+              <a:schemeClr val="phClr">
+                <a:satMod val="103000"/>
+                <a:lumMod val="102000"/>
+                <a:tint val="94000"/>
+              </a:schemeClr>
+            </a:gs>
+            <a:gs pos="50000">
+              <a:schemeClr val="phClr">
+                <a:satMod val="110000"/>
+                <a:lumMod val="100000"/>
+                <a:shade val="100000"/>
+              </a:schemeClr>
+            </a:gs>
+            <a:gs pos="100000">
+              <a:schemeClr val="phClr">
+                <a:lumMod val="99000"/>
+                <a:satMod val="120000"/>
+                <a:shade val="78000"/>
+              </a:schemeClr>
+            </a:gs>
+          </a:gsLst>
+          <a:lin ang="5400000" scaled="0"/>
+        </a:gradFill>
+      </a:fillStyleLst>
+      <a:lnStyleLst>
+        <a:ln w="12700" cap="flat" cmpd="sng" algn="ctr">
+          <a:solidFill>
+            <a:schemeClr val="phClr"/>
+          </a:solidFill>
+          <a:prstDash val="solid"/>
+          <a:miter lim="800000"/>
+        </a:ln>
+        <a:ln w="19050" cap="flat" cmpd="sng" algn="ctr">
+          <a:solidFill>
+            <a:schemeClr val="phClr"/>
+          </a:solidFill>
+          <a:prstDash val="solid"/>
+          <a:miter lim="800000"/>
+        </a:ln>
+        <a:ln w="25400" cap="flat" cmpd="sng" algn="ctr">
+          <a:solidFill>
+            <a:schemeClr val="phClr"/>
+          </a:solidFill>
+          <a:prstDash val="solid"/>
+          <a:miter lim="800000"/>
+        </a:ln>
+      </a:lnStyleLst>
+      <a:effectStyleLst>
+        <a:effectStyle>
+          <a:effectLst/>
+        </a:effectStyle>
+        <a:effectStyle>
+          <a:effectLst/>
+        </a:effectStyle>
+        <a:effectStyle>
+          <a:effectLst>
+            <a:outerShdw blurRad="57150" dist="19050" dir="5400000" algn="ctr" rotWithShape="0">
+              <a:srgbClr val="000000">
+                <a:alpha val="63000"/>
+              </a:srgbClr>
+            </a:outerShdw>
+          </a:effectLst>
+        </a:effectStyle>
+      </a:effectStyleLst>
+      <a:bgFillStyleLst>
+        <a:solidFill>
+          <a:schemeClr val="phClr"/>
+        </a:solidFill>
+        <a:solidFill>
+          <a:schemeClr val="phClr">
+            <a:tint val="95000"/>
+            <a:satMod val="170000"/>
+          </a:schemeClr>
+        </a:solidFill>
+        <a:gradFill rotWithShape="1">
+          <a:gsLst>
+            <a:gs pos="0">
+              <a:schemeClr val="phClr">
+                <a:tint val="93000"/>
+                <a:satMod val="150000"/>
+                <a:shade val="98000"/>
+                <a:lumMod val="102000"/>
+              </a:schemeClr>
+            </a:gs>
+            <a:gs pos="50000">
+              <a:schemeClr val="phClr">
+                <a:tint val="98000"/>
+                <a:satMod val="130000"/>
+                <a:shade val="90000"/>
+                <a:lumMod val="103000"/>
+              </a:schemeClr>
+            </a:gs>
+            <a:gs pos="100000">
+              <a:schemeClr val="phClr">
+                <a:shade val="63000"/>
+                <a:satMod val="120000"/>
+              </a:schemeClr>
+            </a:gs>
+          </a:gsLst>
+          <a:lin ang="5400000" scaled="0"/>
+        </a:gradFill>
+      </a:bgFillStyleLst>
+    </a:fmtScheme>
+  </a:themeElements>
+  <a:objectDefaults>
+    <a:lnDef>
+      <a:spPr/>
+      <a:bodyPr/>
+      <a:lstStyle/>
+      <a:style>
+        <a:lnRef idx="2">
+          <a:schemeClr val="accent1"/>
+        </a:lnRef>
+        <a:fillRef idx="0">
+          <a:schemeClr val="accent1"/>
+        </a:fillRef>
+        <a:effectRef idx="1">
+          <a:schemeClr val="accent1"/>
+        </a:effectRef>
+        <a:fontRef idx="minor">
+          <a:schemeClr val="tx1"/>
+        </a:fontRef>
+      </a:style>
+    </a:lnDef>
+  </a:objectDefaults>
+  <a:extraClrSchemeLst/>
+  <a:extLst>
+    <a:ext uri="{05A4C25C-085E-4340-85A3-A5531E510DB2}">
+      <thm15:themeFamily xmlns:thm15="http://schemas.microsoft.com/office/thememl/2012/main" name="Office Theme" id="{2E142A2C-CD16-42D6-873A-C26D2A0506FA}" vid="{1BDDFF52-6CD6-40A5-AB3C-68EB2F1E4D0A}"/>
+    </a:ext>
+  </a:extLst>
+</a:theme>
 </file>